--- a/templates/proposal/pptx/product-pitch.pptx
+++ b/templates/proposal/pptx/product-pitch.pptx
@@ -1585,8 +1585,8 @@
         </p:nvSpPr>
         <p:spPr>
           <a:xfrm>
-            <a:off x="0" y="6217920"/>
-            <a:ext cx="12192000" cy="73152"/>
+            <a:off x="0" y="6565392"/>
+            <a:ext cx="12192000" cy="54864"/>
           </a:xfrm>
           <a:prstGeom prst="rect">
             <a:avLst/>
@@ -1605,8 +1605,8 @@
         </p:nvSpPr>
         <p:spPr>
           <a:xfrm>
-            <a:off x="274320" y="6291072"/>
-            <a:ext cx="1828800" cy="182880"/>
+            <a:off x="274320" y="6620256"/>
+            <a:ext cx="1828800" cy="201168"/>
           </a:xfrm>
           <a:prstGeom prst="rect">
             <a:avLst/>
@@ -1622,14 +1622,56 @@
               <a:buNone/>
             </a:pPr>
             <a:r>
-              <a:rPr lang="en-US" sz="900" dirty="0">
+              <a:rPr lang="en-US" sz="800" dirty="0">
                 <a:solidFill>
                   <a:srgbClr val="8892B0"/>
                 </a:solidFill>
+                <a:latin typeface="Calibri" pitchFamily="34" charset="0"/>
+                <a:ea typeface="Calibri" pitchFamily="34" charset="-122"/>
+                <a:cs typeface="Calibri" pitchFamily="34" charset="-120"/>
               </a:rPr>
               <a:t>ViePilot</a:t>
             </a:r>
-            <a:endParaRPr lang="en-US" sz="900" dirty="0"/>
+            <a:endParaRPr lang="en-US" sz="800" dirty="0"/>
+          </a:p>
+        </p:txBody>
+      </p:sp>
+      <p:sp>
+        <p:nvSpPr>
+          <p:cNvPr id="4" name="Text 2"/>
+          <p:cNvSpPr/>
+          <p:nvPr/>
+        </p:nvSpPr>
+        <p:spPr>
+          <a:xfrm>
+            <a:off x="10515600" y="6620256"/>
+            <a:ext cx="1371600" cy="201168"/>
+          </a:xfrm>
+          <a:prstGeom prst="rect">
+            <a:avLst/>
+          </a:prstGeom>
+          <a:noFill/>
+          <a:ln/>
+        </p:spPr>
+        <p:txBody>
+          <a:bodyPr wrap="square" rtlCol="0" anchor="ctr"/>
+          <a:lstStyle/>
+          <a:p>
+            <a:pPr algn="r" indent="0" marL="0">
+              <a:buNone/>
+            </a:pPr>
+            <a:r>
+              <a:rPr lang="en-US" sz="800" dirty="0">
+                <a:solidFill>
+                  <a:srgbClr val="5A637A"/>
+                </a:solidFill>
+                <a:latin typeface="Calibri" pitchFamily="34" charset="0"/>
+                <a:ea typeface="Calibri" pitchFamily="34" charset="-122"/>
+                <a:cs typeface="Calibri" pitchFamily="34" charset="-120"/>
+              </a:rPr>
+              <a:t>·</a:t>
+            </a:r>
+            <a:endParaRPr lang="en-US" sz="800" dirty="0"/>
           </a:p>
         </p:txBody>
       </p:sp>
@@ -1944,8 +1986,28 @@
         </p:nvSpPr>
         <p:spPr>
           <a:xfrm>
-            <a:off x="0" y="1645920"/>
-            <a:ext cx="109728" cy="2194560"/>
+            <a:off x="0" y="0"/>
+            <a:ext cx="4754880" cy="6858000"/>
+          </a:xfrm>
+          <a:prstGeom prst="rect">
+            <a:avLst/>
+          </a:prstGeom>
+          <a:solidFill>
+            <a:srgbClr val="2D3142"/>
+          </a:solidFill>
+          <a:ln/>
+        </p:spPr>
+      </p:sp>
+      <p:sp>
+        <p:nvSpPr>
+          <p:cNvPr id="3" name="Shape 1"/>
+          <p:cNvSpPr/>
+          <p:nvPr/>
+        </p:nvSpPr>
+        <p:spPr>
+          <a:xfrm>
+            <a:off x="0" y="0"/>
+            <a:ext cx="182880" cy="6858000"/>
           </a:xfrm>
           <a:prstGeom prst="rect">
             <a:avLst/>
@@ -1958,14 +2020,34 @@
       </p:sp>
       <p:sp>
         <p:nvSpPr>
-          <p:cNvPr id="3" name="Text 1"/>
-          <p:cNvSpPr/>
-          <p:nvPr/>
-        </p:nvSpPr>
-        <p:spPr>
-          <a:xfrm>
-            <a:off x="365760" y="1737360"/>
-            <a:ext cx="10607040" cy="1097280"/>
+          <p:cNvPr id="4" name="Shape 2"/>
+          <p:cNvSpPr/>
+          <p:nvPr/>
+        </p:nvSpPr>
+        <p:spPr>
+          <a:xfrm>
+            <a:off x="4937760" y="2560320"/>
+            <a:ext cx="7040880" cy="45720"/>
+          </a:xfrm>
+          <a:prstGeom prst="rect">
+            <a:avLst/>
+          </a:prstGeom>
+          <a:solidFill>
+            <a:srgbClr val="4F6EF7"/>
+          </a:solidFill>
+          <a:ln/>
+        </p:spPr>
+      </p:sp>
+      <p:sp>
+        <p:nvSpPr>
+          <p:cNvPr id="5" name="Text 3"/>
+          <p:cNvSpPr/>
+          <p:nvPr/>
+        </p:nvSpPr>
+        <p:spPr>
+          <a:xfrm>
+            <a:off x="5120640" y="457200"/>
+            <a:ext cx="6766560" cy="365760"/>
           </a:xfrm>
           <a:prstGeom prst="rect">
             <a:avLst/>
@@ -1981,30 +2063,30 @@
               <a:buNone/>
             </a:pPr>
             <a:r>
-              <a:rPr lang="en-US" sz="4000" b="1" dirty="0">
-                <a:solidFill>
-                  <a:srgbClr val="E8ECF4"/>
-                </a:solidFill>
-                <a:latin typeface="Calibri" pitchFamily="34" charset="0"/>
-                <a:ea typeface="Calibri" pitchFamily="34" charset="-122"/>
-                <a:cs typeface="Calibri" pitchFamily="34" charset="-120"/>
-              </a:rPr>
-              <a:t>{{Product Name}}</a:t>
-            </a:r>
-            <a:endParaRPr lang="en-US" sz="4000" dirty="0"/>
-          </a:p>
-        </p:txBody>
-      </p:sp>
-      <p:sp>
-        <p:nvSpPr>
-          <p:cNvPr id="4" name="Text 2"/>
-          <p:cNvSpPr/>
-          <p:nvPr/>
-        </p:nvSpPr>
-        <p:spPr>
-          <a:xfrm>
-            <a:off x="365760" y="2926080"/>
-            <a:ext cx="8229600" cy="640080"/>
+              <a:rPr lang="en-US" sz="1100" b="1" spc="300" kern="0" dirty="0">
+                <a:solidFill>
+                  <a:srgbClr val="4F6EF7"/>
+                </a:solidFill>
+                <a:latin typeface="Calibri" pitchFamily="34" charset="0"/>
+                <a:ea typeface="Calibri" pitchFamily="34" charset="-122"/>
+                <a:cs typeface="Calibri" pitchFamily="34" charset="-120"/>
+              </a:rPr>
+              <a:t>PROPOSAL</a:t>
+            </a:r>
+            <a:endParaRPr lang="en-US" sz="1100" dirty="0"/>
+          </a:p>
+        </p:txBody>
+      </p:sp>
+      <p:sp>
+        <p:nvSpPr>
+          <p:cNvPr id="6" name="Text 4"/>
+          <p:cNvSpPr/>
+          <p:nvPr/>
+        </p:nvSpPr>
+        <p:spPr>
+          <a:xfrm>
+            <a:off x="4937760" y="1005840"/>
+            <a:ext cx="7040880" cy="1645920"/>
           </a:xfrm>
           <a:prstGeom prst="rect">
             <a:avLst/>
@@ -2020,30 +2102,30 @@
               <a:buNone/>
             </a:pPr>
             <a:r>
-              <a:rPr lang="en-US" sz="2000" dirty="0">
-                <a:solidFill>
-                  <a:srgbClr val="8892B0"/>
-                </a:solidFill>
-                <a:latin typeface="Calibri" pitchFamily="34" charset="0"/>
-                <a:ea typeface="Calibri" pitchFamily="34" charset="-122"/>
-                <a:cs typeface="Calibri" pitchFamily="34" charset="-120"/>
-              </a:rPr>
-              <a:t>{{Tagline}} · {{Date}}</a:t>
-            </a:r>
-            <a:endParaRPr lang="en-US" sz="2000" dirty="0"/>
-          </a:p>
-        </p:txBody>
-      </p:sp>
-      <p:sp>
-        <p:nvSpPr>
-          <p:cNvPr id="5" name="Text 3"/>
-          <p:cNvSpPr/>
-          <p:nvPr/>
-        </p:nvSpPr>
-        <p:spPr>
-          <a:xfrm>
-            <a:off x="365760" y="3840480"/>
-            <a:ext cx="5486400" cy="320040"/>
+              <a:rPr lang="en-US" sz="3400" b="1" dirty="0">
+                <a:solidFill>
+                  <a:srgbClr val="E8ECF4"/>
+                </a:solidFill>
+                <a:latin typeface="Calibri" pitchFamily="34" charset="0"/>
+                <a:ea typeface="Calibri" pitchFamily="34" charset="-122"/>
+                <a:cs typeface="Calibri" pitchFamily="34" charset="-120"/>
+              </a:rPr>
+              <a:t>{{Product Name}}</a:t>
+            </a:r>
+            <a:endParaRPr lang="en-US" sz="3400" dirty="0"/>
+          </a:p>
+        </p:txBody>
+      </p:sp>
+      <p:sp>
+        <p:nvSpPr>
+          <p:cNvPr id="7" name="Text 5"/>
+          <p:cNvSpPr/>
+          <p:nvPr/>
+        </p:nvSpPr>
+        <p:spPr>
+          <a:xfrm>
+            <a:off x="4937760" y="2743200"/>
+            <a:ext cx="7040880" cy="822960"/>
           </a:xfrm>
           <a:prstGeom prst="rect">
             <a:avLst/>
@@ -2059,12 +2141,132 @@
               <a:buNone/>
             </a:pPr>
             <a:r>
+              <a:rPr lang="en-US" sz="1700" dirty="0">
+                <a:solidFill>
+                  <a:srgbClr val="8892B0"/>
+                </a:solidFill>
+                <a:latin typeface="Calibri" pitchFamily="34" charset="0"/>
+                <a:ea typeface="Calibri" pitchFamily="34" charset="-122"/>
+                <a:cs typeface="Calibri" pitchFamily="34" charset="-120"/>
+              </a:rPr>
+              <a:t>{{One sentence: who you help, what problem you solve, and the key outcome}}</a:t>
+            </a:r>
+            <a:endParaRPr lang="en-US" sz="1700" dirty="0"/>
+          </a:p>
+        </p:txBody>
+      </p:sp>
+      <p:sp>
+        <p:nvSpPr>
+          <p:cNvPr id="8" name="Text 6"/>
+          <p:cNvSpPr/>
+          <p:nvPr/>
+        </p:nvSpPr>
+        <p:spPr>
+          <a:xfrm>
+            <a:off x="4937760" y="3749040"/>
+            <a:ext cx="7040880" cy="457200"/>
+          </a:xfrm>
+          <a:prstGeom prst="rect">
+            <a:avLst/>
+          </a:prstGeom>
+          <a:noFill/>
+          <a:ln/>
+        </p:spPr>
+        <p:txBody>
+          <a:bodyPr wrap="square" rtlCol="0" anchor="ctr"/>
+          <a:lstStyle/>
+          <a:p>
+            <a:pPr indent="0" marL="0">
+              <a:buNone/>
+            </a:pPr>
+            <a:r>
+              <a:rPr lang="en-US" sz="1200" dirty="0">
+                <a:solidFill>
+                  <a:srgbClr val="5A637A"/>
+                </a:solidFill>
+                <a:latin typeface="Calibri" pitchFamily="34" charset="0"/>
+                <a:ea typeface="Calibri" pitchFamily="34" charset="-122"/>
+                <a:cs typeface="Calibri" pitchFamily="34" charset="-120"/>
+              </a:rPr>
+              <a:t>{{Round / Stage}} · {{Date}}</a:t>
+            </a:r>
+            <a:endParaRPr lang="en-US" sz="1200" dirty="0"/>
+          </a:p>
+        </p:txBody>
+      </p:sp>
+      <p:sp>
+        <p:nvSpPr>
+          <p:cNvPr id="9" name="Text 7"/>
+          <p:cNvSpPr/>
+          <p:nvPr/>
+        </p:nvSpPr>
+        <p:spPr>
+          <a:xfrm>
+            <a:off x="365760" y="457200"/>
+            <a:ext cx="1097280" cy="1097280"/>
+          </a:xfrm>
+          <a:prstGeom prst="rect">
+            <a:avLst/>
+          </a:prstGeom>
+          <a:noFill/>
+          <a:ln/>
+        </p:spPr>
+        <p:txBody>
+          <a:bodyPr wrap="square" rtlCol="0" anchor="ctr"/>
+          <a:lstStyle/>
+          <a:p>
+            <a:pPr indent="0" marL="0">
+              <a:buNone/>
+            </a:pPr>
+            <a:r>
+              <a:rPr lang="en-US" sz="5600" b="1" dirty="0">
+                <a:solidFill>
+                  <a:srgbClr val="4F6EF7"/>
+                </a:solidFill>
+                <a:latin typeface="Calibri" pitchFamily="34" charset="0"/>
+                <a:ea typeface="Calibri" pitchFamily="34" charset="-122"/>
+                <a:cs typeface="Calibri" pitchFamily="34" charset="-120"/>
+              </a:rPr>
+              <a:t>V</a:t>
+            </a:r>
+            <a:endParaRPr lang="en-US" sz="5600" dirty="0"/>
+          </a:p>
+        </p:txBody>
+      </p:sp>
+      <p:sp>
+        <p:nvSpPr>
+          <p:cNvPr id="10" name="Text 8"/>
+          <p:cNvSpPr/>
+          <p:nvPr/>
+        </p:nvSpPr>
+        <p:spPr>
+          <a:xfrm>
+            <a:off x="365760" y="5943600"/>
+            <a:ext cx="4023360" cy="365760"/>
+          </a:xfrm>
+          <a:prstGeom prst="rect">
+            <a:avLst/>
+          </a:prstGeom>
+          <a:noFill/>
+          <a:ln/>
+        </p:spPr>
+        <p:txBody>
+          <a:bodyPr wrap="square" rtlCol="0" anchor="ctr"/>
+          <a:lstStyle/>
+          <a:p>
+            <a:pPr indent="0" marL="0">
+              <a:buNone/>
+            </a:pPr>
+            <a:r>
               <a:rPr lang="en-US" sz="1100" dirty="0">
                 <a:solidFill>
                   <a:srgbClr val="8892B0"/>
                 </a:solidFill>
-              </a:rPr>
-              <a:t>Prepared with ViePilot · 2026</a:t>
+                <a:latin typeface="Calibri" pitchFamily="34" charset="0"/>
+                <a:ea typeface="Calibri" pitchFamily="34" charset="-122"/>
+                <a:cs typeface="Calibri" pitchFamily="34" charset="-120"/>
+              </a:rPr>
+              <a:t>ViePilot</a:t>
             </a:r>
             <a:endParaRPr lang="en-US" sz="1100" dirty="0"/>
           </a:p>
@@ -2104,7 +2306,27 @@
         <p:spPr>
           <a:xfrm>
             <a:off x="0" y="0"/>
-            <a:ext cx="12192000" cy="1005840"/>
+            <a:ext cx="109728" cy="6858000"/>
+          </a:xfrm>
+          <a:prstGeom prst="rect">
+            <a:avLst/>
+          </a:prstGeom>
+          <a:solidFill>
+            <a:srgbClr val="4F6EF7"/>
+          </a:solidFill>
+          <a:ln/>
+        </p:spPr>
+      </p:sp>
+      <p:sp>
+        <p:nvSpPr>
+          <p:cNvPr id="3" name="Shape 1"/>
+          <p:cNvSpPr/>
+          <p:nvPr/>
+        </p:nvSpPr>
+        <p:spPr>
+          <a:xfrm>
+            <a:off x="109728" y="0"/>
+            <a:ext cx="12079224" cy="914400"/>
           </a:xfrm>
           <a:prstGeom prst="rect">
             <a:avLst/>
@@ -2117,14 +2339,14 @@
       </p:sp>
       <p:sp>
         <p:nvSpPr>
-          <p:cNvPr id="3" name="Text 1"/>
-          <p:cNvSpPr/>
-          <p:nvPr/>
-        </p:nvSpPr>
-        <p:spPr>
-          <a:xfrm>
-            <a:off x="365760" y="164592"/>
-            <a:ext cx="10607040" cy="685800"/>
+          <p:cNvPr id="4" name="Text 2"/>
+          <p:cNvSpPr/>
+          <p:nvPr/>
+        </p:nvSpPr>
+        <p:spPr>
+          <a:xfrm>
+            <a:off x="347472" y="109728"/>
+            <a:ext cx="11612880" cy="694944"/>
           </a:xfrm>
           <a:prstGeom prst="rect">
             <a:avLst/>
@@ -2140,7 +2362,7 @@
               <a:buNone/>
             </a:pPr>
             <a:r>
-              <a:rPr lang="en-US" sz="2400" b="1" dirty="0">
+              <a:rPr lang="en-US" sz="2200" b="1" dirty="0">
                 <a:solidFill>
                   <a:srgbClr val="E8ECF4"/>
                 </a:solidFill>
@@ -2150,20 +2372,20 @@
               </a:rPr>
               <a:t>Roadmap</a:t>
             </a:r>
-            <a:endParaRPr lang="en-US" sz="2400" dirty="0"/>
-          </a:p>
-        </p:txBody>
-      </p:sp>
-      <p:sp>
-        <p:nvSpPr>
-          <p:cNvPr id="4" name="Text 2"/>
-          <p:cNvSpPr/>
-          <p:nvPr/>
-        </p:nvSpPr>
-        <p:spPr>
-          <a:xfrm>
-            <a:off x="457200" y="1188720"/>
-            <a:ext cx="10424160" cy="4754880"/>
+            <a:endParaRPr lang="en-US" sz="2200" dirty="0"/>
+          </a:p>
+        </p:txBody>
+      </p:sp>
+      <p:sp>
+        <p:nvSpPr>
+          <p:cNvPr id="5" name="Text 3"/>
+          <p:cNvSpPr/>
+          <p:nvPr/>
+        </p:nvSpPr>
+        <p:spPr>
+          <a:xfrm>
+            <a:off x="457200" y="1097280"/>
+            <a:ext cx="11430000" cy="5212080"/>
           </a:xfrm>
           <a:prstGeom prst="rect">
             <a:avLst/>
@@ -2175,12 +2397,13 @@
           <a:bodyPr wrap="square" rtlCol="0" anchor="t"/>
           <a:lstStyle/>
           <a:p>
-            <a:pPr marL="342900" indent="-342900">
-              <a:buSzPct val="100000"/>
-              <a:buChar char="•"/>
-            </a:pPr>
-            <a:r>
-              <a:rPr lang="en-US" sz="1600" dirty="0">
+            <a:pPr>
+              <a:spcAft>
+                <a:spcPts val="800"/>
+              </a:spcAft>
+            </a:pPr>
+            <a:r>
+              <a:rPr lang="en-US" sz="1500" dirty="0">
                 <a:solidFill>
                   <a:srgbClr val="E8ECF4"/>
                 </a:solidFill>
@@ -2188,17 +2411,18 @@
                 <a:ea typeface="Calibri" pitchFamily="34" charset="-122"/>
                 <a:cs typeface="Calibri" pitchFamily="34" charset="-120"/>
               </a:rPr>
-              <a:t>Q1: {{milestone}}</a:t>
-            </a:r>
-            <a:endParaRPr lang="en-US" sz="1600" dirty="0"/>
-          </a:p>
-          <a:p>
-            <a:pPr marL="342900" indent="-342900">
-              <a:buSzPct val="100000"/>
-              <a:buChar char="•"/>
-            </a:pPr>
-            <a:r>
-              <a:rPr lang="en-US" sz="1600" dirty="0">
+              <a:t>Q{{N}} {{Year}}: {{Milestone — e.g. GA launch, key integration, first enterprise deal}}</a:t>
+            </a:r>
+            <a:endParaRPr lang="en-US" sz="1500" dirty="0"/>
+          </a:p>
+          <a:p>
+            <a:pPr>
+              <a:spcAft>
+                <a:spcPts val="800"/>
+              </a:spcAft>
+            </a:pPr>
+            <a:r>
+              <a:rPr lang="en-US" sz="1500" dirty="0">
                 <a:solidFill>
                   <a:srgbClr val="E8ECF4"/>
                 </a:solidFill>
@@ -2206,17 +2430,18 @@
                 <a:ea typeface="Calibri" pitchFamily="34" charset="-122"/>
                 <a:cs typeface="Calibri" pitchFamily="34" charset="-120"/>
               </a:rPr>
-              <a:t>Q2: {{milestone}}</a:t>
-            </a:r>
-            <a:endParaRPr lang="en-US" sz="1600" dirty="0"/>
-          </a:p>
-          <a:p>
-            <a:pPr marL="342900" indent="-342900">
-              <a:buSzPct val="100000"/>
-              <a:buChar char="•"/>
-            </a:pPr>
-            <a:r>
-              <a:rPr lang="en-US" sz="1600" dirty="0">
+              <a:t>Q{{N+1}}: {{Milestone — growth lever or product expansion}}</a:t>
+            </a:r>
+            <a:endParaRPr lang="en-US" sz="1500" dirty="0"/>
+          </a:p>
+          <a:p>
+            <a:pPr>
+              <a:spcAft>
+                <a:spcPts val="800"/>
+              </a:spcAft>
+            </a:pPr>
+            <a:r>
+              <a:rPr lang="en-US" sz="1500" dirty="0">
                 <a:solidFill>
                   <a:srgbClr val="E8ECF4"/>
                 </a:solidFill>
@@ -2224,9 +2449,9 @@
                 <a:ea typeface="Calibri" pitchFamily="34" charset="-122"/>
                 <a:cs typeface="Calibri" pitchFamily="34" charset="-120"/>
               </a:rPr>
-              <a:t>Q3–Q4: {{milestone}}</a:t>
-            </a:r>
-            <a:endParaRPr lang="en-US" sz="1600" dirty="0"/>
+              <a:t>Q{{N+2}}: {{Milestone — scale or expansion target}}</a:t>
+            </a:r>
+            <a:endParaRPr lang="en-US" sz="1500" dirty="0"/>
           </a:p>
         </p:txBody>
       </p:sp>
@@ -2264,7 +2489,27 @@
         <p:spPr>
           <a:xfrm>
             <a:off x="0" y="0"/>
-            <a:ext cx="12192000" cy="1005840"/>
+            <a:ext cx="109728" cy="6858000"/>
+          </a:xfrm>
+          <a:prstGeom prst="rect">
+            <a:avLst/>
+          </a:prstGeom>
+          <a:solidFill>
+            <a:srgbClr val="4F6EF7"/>
+          </a:solidFill>
+          <a:ln/>
+        </p:spPr>
+      </p:sp>
+      <p:sp>
+        <p:nvSpPr>
+          <p:cNvPr id="3" name="Shape 1"/>
+          <p:cNvSpPr/>
+          <p:nvPr/>
+        </p:nvSpPr>
+        <p:spPr>
+          <a:xfrm>
+            <a:off x="109728" y="0"/>
+            <a:ext cx="12079224" cy="914400"/>
           </a:xfrm>
           <a:prstGeom prst="rect">
             <a:avLst/>
@@ -2277,14 +2522,14 @@
       </p:sp>
       <p:sp>
         <p:nvSpPr>
-          <p:cNvPr id="3" name="Text 1"/>
-          <p:cNvSpPr/>
-          <p:nvPr/>
-        </p:nvSpPr>
-        <p:spPr>
-          <a:xfrm>
-            <a:off x="365760" y="164592"/>
-            <a:ext cx="10607040" cy="685800"/>
+          <p:cNvPr id="4" name="Text 2"/>
+          <p:cNvSpPr/>
+          <p:nvPr/>
+        </p:nvSpPr>
+        <p:spPr>
+          <a:xfrm>
+            <a:off x="347472" y="109728"/>
+            <a:ext cx="11612880" cy="694944"/>
           </a:xfrm>
           <a:prstGeom prst="rect">
             <a:avLst/>
@@ -2300,7 +2545,7 @@
               <a:buNone/>
             </a:pPr>
             <a:r>
-              <a:rPr lang="en-US" sz="2400" b="1" dirty="0">
+              <a:rPr lang="en-US" sz="2200" b="1" dirty="0">
                 <a:solidFill>
                   <a:srgbClr val="E8ECF4"/>
                 </a:solidFill>
@@ -2310,20 +2555,20 @@
               </a:rPr>
               <a:t>The Ask</a:t>
             </a:r>
-            <a:endParaRPr lang="en-US" sz="2400" dirty="0"/>
-          </a:p>
-        </p:txBody>
-      </p:sp>
-      <p:sp>
-        <p:nvSpPr>
-          <p:cNvPr id="4" name="Text 2"/>
-          <p:cNvSpPr/>
-          <p:nvPr/>
-        </p:nvSpPr>
-        <p:spPr>
-          <a:xfrm>
-            <a:off x="457200" y="1188720"/>
-            <a:ext cx="10424160" cy="4754880"/>
+            <a:endParaRPr lang="en-US" sz="2200" dirty="0"/>
+          </a:p>
+        </p:txBody>
+      </p:sp>
+      <p:sp>
+        <p:nvSpPr>
+          <p:cNvPr id="5" name="Text 3"/>
+          <p:cNvSpPr/>
+          <p:nvPr/>
+        </p:nvSpPr>
+        <p:spPr>
+          <a:xfrm>
+            <a:off x="457200" y="1097280"/>
+            <a:ext cx="11430000" cy="5212080"/>
           </a:xfrm>
           <a:prstGeom prst="rect">
             <a:avLst/>
@@ -2335,12 +2580,13 @@
           <a:bodyPr wrap="square" rtlCol="0" anchor="t"/>
           <a:lstStyle/>
           <a:p>
-            <a:pPr marL="342900" indent="-342900">
-              <a:buSzPct val="100000"/>
-              <a:buChar char="•"/>
-            </a:pPr>
-            <a:r>
-              <a:rPr lang="en-US" sz="1600" dirty="0">
+            <a:pPr>
+              <a:spcAft>
+                <a:spcPts val="800"/>
+              </a:spcAft>
+            </a:pPr>
+            <a:r>
+              <a:rPr lang="en-US" sz="1500" dirty="0">
                 <a:solidFill>
                   <a:srgbClr val="E8ECF4"/>
                 </a:solidFill>
@@ -2348,17 +2594,18 @@
                 <a:ea typeface="Calibri" pitchFamily="34" charset="-122"/>
                 <a:cs typeface="Calibri" pitchFamily="34" charset="-120"/>
               </a:rPr>
-              <a:t>Raising: {{amount}}</a:t>
-            </a:r>
-            <a:endParaRPr lang="en-US" sz="1600" dirty="0"/>
-          </a:p>
-          <a:p>
-            <a:pPr marL="342900" indent="-342900">
-              <a:buSzPct val="100000"/>
-              <a:buChar char="•"/>
-            </a:pPr>
-            <a:r>
-              <a:rPr lang="en-US" sz="1600" dirty="0">
+              <a:t>Raising: ${{Amount}} ({{round type: pre-seed / seed / Series A}}) </a:t>
+            </a:r>
+            <a:endParaRPr lang="en-US" sz="1500" dirty="0"/>
+          </a:p>
+          <a:p>
+            <a:pPr>
+              <a:spcAft>
+                <a:spcPts val="800"/>
+              </a:spcAft>
+            </a:pPr>
+            <a:r>
+              <a:rPr lang="en-US" sz="1500" dirty="0">
                 <a:solidFill>
                   <a:srgbClr val="E8ECF4"/>
                 </a:solidFill>
@@ -2366,17 +2613,18 @@
                 <a:ea typeface="Calibri" pitchFamily="34" charset="-122"/>
                 <a:cs typeface="Calibri" pitchFamily="34" charset="-120"/>
               </a:rPr>
-              <a:t>Use of funds: {{breakdown}}</a:t>
-            </a:r>
-            <a:endParaRPr lang="en-US" sz="1600" dirty="0"/>
-          </a:p>
-          <a:p>
-            <a:pPr marL="342900" indent="-342900">
-              <a:buSzPct val="100000"/>
-              <a:buChar char="•"/>
-            </a:pPr>
-            <a:r>
-              <a:rPr lang="en-US" sz="1600" dirty="0">
+              <a:t>Use of funds: {{XX}}% product · {{YY}}% GTM · {{ZZ}}% ops</a:t>
+            </a:r>
+            <a:endParaRPr lang="en-US" sz="1500" dirty="0"/>
+          </a:p>
+          <a:p>
+            <a:pPr>
+              <a:spcAft>
+                <a:spcPts val="800"/>
+              </a:spcAft>
+            </a:pPr>
+            <a:r>
+              <a:rPr lang="en-US" sz="1500" dirty="0">
                 <a:solidFill>
                   <a:srgbClr val="E8ECF4"/>
                 </a:solidFill>
@@ -2384,9 +2632,9 @@
                 <a:ea typeface="Calibri" pitchFamily="34" charset="-122"/>
                 <a:cs typeface="Calibri" pitchFamily="34" charset="-120"/>
               </a:rPr>
-              <a:t>Milestones with this round: {{goals}}</a:t>
-            </a:r>
-            <a:endParaRPr lang="en-US" sz="1600" dirty="0"/>
+              <a:t>Key milestone: {{What this round buys — users, revenue, product}}</a:t>
+            </a:r>
+            <a:endParaRPr lang="en-US" sz="1500" dirty="0"/>
           </a:p>
         </p:txBody>
       </p:sp>
@@ -2444,7 +2692,7 @@
         <p:spPr>
           <a:xfrm>
             <a:off x="0" y="0"/>
-            <a:ext cx="12192000" cy="73152"/>
+            <a:ext cx="12192000" cy="137160"/>
           </a:xfrm>
           <a:prstGeom prst="rect">
             <a:avLst/>
@@ -2457,14 +2705,34 @@
       </p:sp>
       <p:sp>
         <p:nvSpPr>
-          <p:cNvPr id="4" name="Text 2"/>
-          <p:cNvSpPr/>
-          <p:nvPr/>
-        </p:nvSpPr>
-        <p:spPr>
-          <a:xfrm>
-            <a:off x="457200" y="1371600"/>
-            <a:ext cx="10424160" cy="1280160"/>
+          <p:cNvPr id="4" name="Shape 2"/>
+          <p:cNvSpPr/>
+          <p:nvPr/>
+        </p:nvSpPr>
+        <p:spPr>
+          <a:xfrm>
+            <a:off x="0" y="6720840"/>
+            <a:ext cx="12192000" cy="137160"/>
+          </a:xfrm>
+          <a:prstGeom prst="rect">
+            <a:avLst/>
+          </a:prstGeom>
+          <a:solidFill>
+            <a:srgbClr val="4F6EF7"/>
+          </a:solidFill>
+          <a:ln/>
+        </p:spPr>
+      </p:sp>
+      <p:sp>
+        <p:nvSpPr>
+          <p:cNvPr id="5" name="Text 3"/>
+          <p:cNvSpPr/>
+          <p:nvPr/>
+        </p:nvSpPr>
+        <p:spPr>
+          <a:xfrm>
+            <a:off x="457200" y="1280160"/>
+            <a:ext cx="11338560" cy="457200"/>
           </a:xfrm>
           <a:prstGeom prst="rect">
             <a:avLst/>
@@ -2480,27 +2748,30 @@
               <a:buNone/>
             </a:pPr>
             <a:r>
-              <a:rPr lang="en-US" sz="4800" b="1" dirty="0">
-                <a:solidFill>
-                  <a:srgbClr val="FFFFFF"/>
-                </a:solidFill>
-              </a:rPr>
-              <a:t>Thank You</a:t>
-            </a:r>
-            <a:endParaRPr lang="en-US" sz="4800" dirty="0"/>
-          </a:p>
-        </p:txBody>
-      </p:sp>
-      <p:sp>
-        <p:nvSpPr>
-          <p:cNvPr id="5" name="Text 3"/>
-          <p:cNvSpPr/>
-          <p:nvPr/>
-        </p:nvSpPr>
-        <p:spPr>
-          <a:xfrm>
-            <a:off x="457200" y="2926080"/>
-            <a:ext cx="10424160" cy="731520"/>
+              <a:rPr lang="en-US" sz="1300" b="1" spc="200" kern="0" dirty="0">
+                <a:solidFill>
+                  <a:srgbClr val="4F6EF7"/>
+                </a:solidFill>
+                <a:latin typeface="Calibri" pitchFamily="34" charset="0"/>
+                <a:ea typeface="Calibri" pitchFamily="34" charset="-122"/>
+                <a:cs typeface="Calibri" pitchFamily="34" charset="-120"/>
+              </a:rPr>
+              <a:t>What's Next</a:t>
+            </a:r>
+            <a:endParaRPr lang="en-US" sz="1300" dirty="0"/>
+          </a:p>
+        </p:txBody>
+      </p:sp>
+      <p:sp>
+        <p:nvSpPr>
+          <p:cNvPr id="6" name="Text 4"/>
+          <p:cNvSpPr/>
+          <p:nvPr/>
+        </p:nvSpPr>
+        <p:spPr>
+          <a:xfrm>
+            <a:off x="914400" y="1920240"/>
+            <a:ext cx="10424160" cy="1828800"/>
           </a:xfrm>
           <a:prstGeom prst="rect">
             <a:avLst/>
@@ -2516,27 +2787,50 @@
               <a:buNone/>
             </a:pPr>
             <a:r>
-              <a:rPr lang="en-US" sz="2000" dirty="0">
-                <a:solidFill>
-                  <a:srgbClr val="8892B0"/>
-                </a:solidFill>
-              </a:rPr>
-              <a:t>Join us in building {{product name}}.</a:t>
-            </a:r>
-            <a:endParaRPr lang="en-US" sz="2000" dirty="0"/>
-          </a:p>
-        </p:txBody>
-      </p:sp>
-      <p:sp>
-        <p:nvSpPr>
-          <p:cNvPr id="6" name="Text 4"/>
-          <p:cNvSpPr/>
-          <p:nvPr/>
-        </p:nvSpPr>
-        <p:spPr>
-          <a:xfrm>
-            <a:off x="457200" y="3931920"/>
-            <a:ext cx="10424160" cy="365760"/>
+              <a:rPr lang="en-US" sz="3200" b="1" dirty="0">
+                <a:solidFill>
+                  <a:srgbClr val="FFFFFF"/>
+                </a:solidFill>
+                <a:latin typeface="Calibri" pitchFamily="34" charset="0"/>
+                <a:ea typeface="Calibri" pitchFamily="34" charset="-122"/>
+                <a:cs typeface="Calibri" pitchFamily="34" charset="-120"/>
+              </a:rPr>
+              <a:t>{{Join us in building {{product name}}.}}</a:t>
+            </a:r>
+            <a:endParaRPr lang="en-US" sz="3200" dirty="0"/>
+          </a:p>
+        </p:txBody>
+      </p:sp>
+      <p:sp>
+        <p:nvSpPr>
+          <p:cNvPr id="7" name="Shape 5"/>
+          <p:cNvSpPr/>
+          <p:nvPr/>
+        </p:nvSpPr>
+        <p:spPr>
+          <a:xfrm>
+            <a:off x="4114800" y="3931920"/>
+            <a:ext cx="4023360" cy="36576"/>
+          </a:xfrm>
+          <a:prstGeom prst="rect">
+            <a:avLst/>
+          </a:prstGeom>
+          <a:solidFill>
+            <a:srgbClr val="4F6EF7"/>
+          </a:solidFill>
+          <a:ln/>
+        </p:spPr>
+      </p:sp>
+      <p:sp>
+        <p:nvSpPr>
+          <p:cNvPr id="8" name="Text 6"/>
+          <p:cNvSpPr/>
+          <p:nvPr/>
+        </p:nvSpPr>
+        <p:spPr>
+          <a:xfrm>
+            <a:off x="457200" y="4160520"/>
+            <a:ext cx="11338560" cy="411480"/>
           </a:xfrm>
           <a:prstGeom prst="rect">
             <a:avLst/>
@@ -2556,10 +2850,52 @@
                 <a:solidFill>
                   <a:srgbClr val="8892B0"/>
                 </a:solidFill>
-              </a:rPr>
-              <a:t>contact@example.com · viepilot.dev</a:t>
+                <a:latin typeface="Calibri" pitchFamily="34" charset="0"/>
+                <a:ea typeface="Calibri" pitchFamily="34" charset="-122"/>
+                <a:cs typeface="Calibri" pitchFamily="34" charset="-120"/>
+              </a:rPr>
+              <a:t>founder@{{product}}.com  ·  deck@{{product}}.com</a:t>
             </a:r>
             <a:endParaRPr lang="en-US" sz="1300" dirty="0"/>
+          </a:p>
+        </p:txBody>
+      </p:sp>
+      <p:sp>
+        <p:nvSpPr>
+          <p:cNvPr id="9" name="Text 7"/>
+          <p:cNvSpPr/>
+          <p:nvPr/>
+        </p:nvSpPr>
+        <p:spPr>
+          <a:xfrm>
+            <a:off x="457200" y="6035040"/>
+            <a:ext cx="11338560" cy="320040"/>
+          </a:xfrm>
+          <a:prstGeom prst="rect">
+            <a:avLst/>
+          </a:prstGeom>
+          <a:noFill/>
+          <a:ln/>
+        </p:spPr>
+        <p:txBody>
+          <a:bodyPr wrap="square" rtlCol="0" anchor="ctr"/>
+          <a:lstStyle/>
+          <a:p>
+            <a:pPr algn="ctr" indent="0" marL="0">
+              <a:buNone/>
+            </a:pPr>
+            <a:r>
+              <a:rPr lang="en-US" sz="1000" dirty="0">
+                <a:solidFill>
+                  <a:srgbClr val="5A637A"/>
+                </a:solidFill>
+                <a:latin typeface="Calibri" pitchFamily="34" charset="0"/>
+                <a:ea typeface="Calibri" pitchFamily="34" charset="-122"/>
+                <a:cs typeface="Calibri" pitchFamily="34" charset="-120"/>
+              </a:rPr>
+              <a:t>Powered by ViePilot</a:t>
+            </a:r>
+            <a:endParaRPr lang="en-US" sz="1000" dirty="0"/>
           </a:p>
         </p:txBody>
       </p:sp>
@@ -2597,7 +2933,27 @@
         <p:spPr>
           <a:xfrm>
             <a:off x="0" y="0"/>
-            <a:ext cx="12192000" cy="1005840"/>
+            <a:ext cx="109728" cy="6858000"/>
+          </a:xfrm>
+          <a:prstGeom prst="rect">
+            <a:avLst/>
+          </a:prstGeom>
+          <a:solidFill>
+            <a:srgbClr val="4F6EF7"/>
+          </a:solidFill>
+          <a:ln/>
+        </p:spPr>
+      </p:sp>
+      <p:sp>
+        <p:nvSpPr>
+          <p:cNvPr id="3" name="Shape 1"/>
+          <p:cNvSpPr/>
+          <p:nvPr/>
+        </p:nvSpPr>
+        <p:spPr>
+          <a:xfrm>
+            <a:off x="109728" y="0"/>
+            <a:ext cx="12079224" cy="914400"/>
           </a:xfrm>
           <a:prstGeom prst="rect">
             <a:avLst/>
@@ -2610,14 +2966,14 @@
       </p:sp>
       <p:sp>
         <p:nvSpPr>
-          <p:cNvPr id="3" name="Text 1"/>
-          <p:cNvSpPr/>
-          <p:nvPr/>
-        </p:nvSpPr>
-        <p:spPr>
-          <a:xfrm>
-            <a:off x="365760" y="164592"/>
-            <a:ext cx="10607040" cy="685800"/>
+          <p:cNvPr id="4" name="Text 2"/>
+          <p:cNvSpPr/>
+          <p:nvPr/>
+        </p:nvSpPr>
+        <p:spPr>
+          <a:xfrm>
+            <a:off x="347472" y="109728"/>
+            <a:ext cx="11612880" cy="694944"/>
           </a:xfrm>
           <a:prstGeom prst="rect">
             <a:avLst/>
@@ -2633,7 +2989,7 @@
               <a:buNone/>
             </a:pPr>
             <a:r>
-              <a:rPr lang="en-US" sz="2400" b="1" dirty="0">
+              <a:rPr lang="en-US" sz="2200" b="1" dirty="0">
                 <a:solidFill>
                   <a:srgbClr val="E8ECF4"/>
                 </a:solidFill>
@@ -2643,20 +2999,20 @@
               </a:rPr>
               <a:t>The Problem</a:t>
             </a:r>
-            <a:endParaRPr lang="en-US" sz="2400" dirty="0"/>
-          </a:p>
-        </p:txBody>
-      </p:sp>
-      <p:sp>
-        <p:nvSpPr>
-          <p:cNvPr id="4" name="Text 2"/>
-          <p:cNvSpPr/>
-          <p:nvPr/>
-        </p:nvSpPr>
-        <p:spPr>
-          <a:xfrm>
-            <a:off x="457200" y="1188720"/>
-            <a:ext cx="10424160" cy="4754880"/>
+            <a:endParaRPr lang="en-US" sz="2200" dirty="0"/>
+          </a:p>
+        </p:txBody>
+      </p:sp>
+      <p:sp>
+        <p:nvSpPr>
+          <p:cNvPr id="5" name="Text 3"/>
+          <p:cNvSpPr/>
+          <p:nvPr/>
+        </p:nvSpPr>
+        <p:spPr>
+          <a:xfrm>
+            <a:off x="457200" y="1097280"/>
+            <a:ext cx="11430000" cy="5212080"/>
           </a:xfrm>
           <a:prstGeom prst="rect">
             <a:avLst/>
@@ -2668,12 +3024,13 @@
           <a:bodyPr wrap="square" rtlCol="0" anchor="t"/>
           <a:lstStyle/>
           <a:p>
-            <a:pPr marL="342900" indent="-342900">
-              <a:buSzPct val="100000"/>
-              <a:buChar char="•"/>
-            </a:pPr>
-            <a:r>
-              <a:rPr lang="en-US" sz="1600" dirty="0">
+            <a:pPr>
+              <a:spcAft>
+                <a:spcPts val="800"/>
+              </a:spcAft>
+            </a:pPr>
+            <a:r>
+              <a:rPr lang="en-US" sz="1500" dirty="0">
                 <a:solidFill>
                   <a:srgbClr val="E8ECF4"/>
                 </a:solidFill>
@@ -2681,17 +3038,18 @@
                 <a:ea typeface="Calibri" pitchFamily="34" charset="-122"/>
                 <a:cs typeface="Calibri" pitchFamily="34" charset="-120"/>
               </a:rPr>
-              <a:t>{{Pain point 1}}</a:t>
-            </a:r>
-            <a:endParaRPr lang="en-US" sz="1600" dirty="0"/>
-          </a:p>
-          <a:p>
-            <a:pPr marL="342900" indent="-342900">
-              <a:buSzPct val="100000"/>
-              <a:buChar char="•"/>
-            </a:pPr>
-            <a:r>
-              <a:rPr lang="en-US" sz="1600" dirty="0">
+              <a:t>{{Vivid description of pain: "Every day, X people struggle with Y — costing Z"}}</a:t>
+            </a:r>
+            <a:endParaRPr lang="en-US" sz="1500" dirty="0"/>
+          </a:p>
+          <a:p>
+            <a:pPr>
+              <a:spcAft>
+                <a:spcPts val="800"/>
+              </a:spcAft>
+            </a:pPr>
+            <a:r>
+              <a:rPr lang="en-US" sz="1500" dirty="0">
                 <a:solidFill>
                   <a:srgbClr val="E8ECF4"/>
                 </a:solidFill>
@@ -2699,17 +3057,18 @@
                 <a:ea typeface="Calibri" pitchFamily="34" charset="-122"/>
                 <a:cs typeface="Calibri" pitchFamily="34" charset="-120"/>
               </a:rPr>
-              <a:t>{{Pain point 2}}</a:t>
-            </a:r>
-            <a:endParaRPr lang="en-US" sz="1600" dirty="0"/>
-          </a:p>
-          <a:p>
-            <a:pPr marL="342900" indent="-342900">
-              <a:buSzPct val="100000"/>
-              <a:buChar char="•"/>
-            </a:pPr>
-            <a:r>
-              <a:rPr lang="en-US" sz="1600" dirty="0">
+              <a:t>{{Why current solutions fail: "Existing tools are X, Y, and Z"}}</a:t>
+            </a:r>
+            <a:endParaRPr lang="en-US" sz="1500" dirty="0"/>
+          </a:p>
+          <a:p>
+            <a:pPr>
+              <a:spcAft>
+                <a:spcPts val="800"/>
+              </a:spcAft>
+            </a:pPr>
+            <a:r>
+              <a:rPr lang="en-US" sz="1500" dirty="0">
                 <a:solidFill>
                   <a:srgbClr val="E8ECF4"/>
                 </a:solidFill>
@@ -2717,9 +3076,9 @@
                 <a:ea typeface="Calibri" pitchFamily="34" charset="-122"/>
                 <a:cs typeface="Calibri" pitchFamily="34" charset="-120"/>
               </a:rPr>
-              <a:t>{{Market gap}}</a:t>
-            </a:r>
-            <a:endParaRPr lang="en-US" sz="1600" dirty="0"/>
+              <a:t>{{Market signal: survey data, search volume, or VC attention}}</a:t>
+            </a:r>
+            <a:endParaRPr lang="en-US" sz="1500" dirty="0"/>
           </a:p>
         </p:txBody>
       </p:sp>
@@ -2757,7 +3116,27 @@
         <p:spPr>
           <a:xfrm>
             <a:off x="0" y="0"/>
-            <a:ext cx="12192000" cy="1005840"/>
+            <a:ext cx="109728" cy="6858000"/>
+          </a:xfrm>
+          <a:prstGeom prst="rect">
+            <a:avLst/>
+          </a:prstGeom>
+          <a:solidFill>
+            <a:srgbClr val="4F6EF7"/>
+          </a:solidFill>
+          <a:ln/>
+        </p:spPr>
+      </p:sp>
+      <p:sp>
+        <p:nvSpPr>
+          <p:cNvPr id="3" name="Shape 1"/>
+          <p:cNvSpPr/>
+          <p:nvPr/>
+        </p:nvSpPr>
+        <p:spPr>
+          <a:xfrm>
+            <a:off x="109728" y="0"/>
+            <a:ext cx="12079224" cy="914400"/>
           </a:xfrm>
           <a:prstGeom prst="rect">
             <a:avLst/>
@@ -2770,14 +3149,14 @@
       </p:sp>
       <p:sp>
         <p:nvSpPr>
-          <p:cNvPr id="3" name="Text 1"/>
-          <p:cNvSpPr/>
-          <p:nvPr/>
-        </p:nvSpPr>
-        <p:spPr>
-          <a:xfrm>
-            <a:off x="365760" y="164592"/>
-            <a:ext cx="10607040" cy="685800"/>
+          <p:cNvPr id="4" name="Text 2"/>
+          <p:cNvSpPr/>
+          <p:nvPr/>
+        </p:nvSpPr>
+        <p:spPr>
+          <a:xfrm>
+            <a:off x="347472" y="109728"/>
+            <a:ext cx="11612880" cy="694944"/>
           </a:xfrm>
           <a:prstGeom prst="rect">
             <a:avLst/>
@@ -2793,7 +3172,7 @@
               <a:buNone/>
             </a:pPr>
             <a:r>
-              <a:rPr lang="en-US" sz="2400" b="1" dirty="0">
+              <a:rPr lang="en-US" sz="2200" b="1" dirty="0">
                 <a:solidFill>
                   <a:srgbClr val="E8ECF4"/>
                 </a:solidFill>
@@ -2803,20 +3182,20 @@
               </a:rPr>
               <a:t>Our Solution</a:t>
             </a:r>
-            <a:endParaRPr lang="en-US" sz="2400" dirty="0"/>
-          </a:p>
-        </p:txBody>
-      </p:sp>
-      <p:sp>
-        <p:nvSpPr>
-          <p:cNvPr id="4" name="Text 2"/>
-          <p:cNvSpPr/>
-          <p:nvPr/>
-        </p:nvSpPr>
-        <p:spPr>
-          <a:xfrm>
-            <a:off x="457200" y="1188720"/>
-            <a:ext cx="10424160" cy="4754880"/>
+            <a:endParaRPr lang="en-US" sz="2200" dirty="0"/>
+          </a:p>
+        </p:txBody>
+      </p:sp>
+      <p:sp>
+        <p:nvSpPr>
+          <p:cNvPr id="5" name="Text 3"/>
+          <p:cNvSpPr/>
+          <p:nvPr/>
+        </p:nvSpPr>
+        <p:spPr>
+          <a:xfrm>
+            <a:off x="457200" y="1097280"/>
+            <a:ext cx="11430000" cy="5212080"/>
           </a:xfrm>
           <a:prstGeom prst="rect">
             <a:avLst/>
@@ -2828,12 +3207,13 @@
           <a:bodyPr wrap="square" rtlCol="0" anchor="t"/>
           <a:lstStyle/>
           <a:p>
-            <a:pPr marL="342900" indent="-342900">
-              <a:buSzPct val="100000"/>
-              <a:buChar char="•"/>
-            </a:pPr>
-            <a:r>
-              <a:rPr lang="en-US" sz="1600" dirty="0">
+            <a:pPr>
+              <a:spcAft>
+                <a:spcPts val="800"/>
+              </a:spcAft>
+            </a:pPr>
+            <a:r>
+              <a:rPr lang="en-US" sz="1500" dirty="0">
                 <a:solidFill>
                   <a:srgbClr val="E8ECF4"/>
                 </a:solidFill>
@@ -2841,17 +3221,18 @@
                 <a:ea typeface="Calibri" pitchFamily="34" charset="-122"/>
                 <a:cs typeface="Calibri" pitchFamily="34" charset="-120"/>
               </a:rPr>
-              <a:t>{{What it does}}</a:t>
-            </a:r>
-            <a:endParaRPr lang="en-US" sz="1600" dirty="0"/>
-          </a:p>
-          <a:p>
-            <a:pPr marL="342900" indent="-342900">
-              <a:buSzPct val="100000"/>
-              <a:buChar char="•"/>
-            </a:pPr>
-            <a:r>
-              <a:rPr lang="en-US" sz="1600" dirty="0">
+              <a:t>{{What it does in one sentence: "{{Product}} lets X do Y in Z time"}}</a:t>
+            </a:r>
+            <a:endParaRPr lang="en-US" sz="1500" dirty="0"/>
+          </a:p>
+          <a:p>
+            <a:pPr>
+              <a:spcAft>
+                <a:spcPts val="800"/>
+              </a:spcAft>
+            </a:pPr>
+            <a:r>
+              <a:rPr lang="en-US" sz="1500" dirty="0">
                 <a:solidFill>
                   <a:srgbClr val="E8ECF4"/>
                 </a:solidFill>
@@ -2859,17 +3240,18 @@
                 <a:ea typeface="Calibri" pitchFamily="34" charset="-122"/>
                 <a:cs typeface="Calibri" pitchFamily="34" charset="-120"/>
               </a:rPr>
-              <a:t>{{How it's different}}</a:t>
-            </a:r>
-            <a:endParaRPr lang="en-US" sz="1600" dirty="0"/>
-          </a:p>
-          <a:p>
-            <a:pPr marL="342900" indent="-342900">
-              <a:buSzPct val="100000"/>
-              <a:buChar char="•"/>
-            </a:pPr>
-            <a:r>
-              <a:rPr lang="en-US" sz="1600" dirty="0">
+              <a:t>{{Key differentiator: what makes this fundamentally different}}</a:t>
+            </a:r>
+            <a:endParaRPr lang="en-US" sz="1500" dirty="0"/>
+          </a:p>
+          <a:p>
+            <a:pPr>
+              <a:spcAft>
+                <a:spcPts val="800"/>
+              </a:spcAft>
+            </a:pPr>
+            <a:r>
+              <a:rPr lang="en-US" sz="1500" dirty="0">
                 <a:solidFill>
                   <a:srgbClr val="E8ECF4"/>
                 </a:solidFill>
@@ -2877,9 +3259,9 @@
                 <a:ea typeface="Calibri" pitchFamily="34" charset="-122"/>
                 <a:cs typeface="Calibri" pitchFamily="34" charset="-120"/>
               </a:rPr>
-              <a:t>{{Core value proposition}}</a:t>
-            </a:r>
-            <a:endParaRPr lang="en-US" sz="1600" dirty="0"/>
+              <a:t>{{User experience: describe the "aha moment" for a new user}}</a:t>
+            </a:r>
+            <a:endParaRPr lang="en-US" sz="1500" dirty="0"/>
           </a:p>
         </p:txBody>
       </p:sp>
@@ -2917,7 +3299,7 @@
         <p:spPr>
           <a:xfrm>
             <a:off x="0" y="0"/>
-            <a:ext cx="12192000" cy="1005840"/>
+            <a:ext cx="12192000" cy="914400"/>
           </a:xfrm>
           <a:prstGeom prst="rect">
             <a:avLst/>
@@ -2936,8 +3318,8 @@
         </p:nvSpPr>
         <p:spPr>
           <a:xfrm>
-            <a:off x="365760" y="164592"/>
-            <a:ext cx="10607040" cy="685800"/>
+            <a:off x="347472" y="109728"/>
+            <a:ext cx="11612880" cy="694944"/>
           </a:xfrm>
           <a:prstGeom prst="rect">
             <a:avLst/>
@@ -2953,7 +3335,7 @@
               <a:buNone/>
             </a:pPr>
             <a:r>
-              <a:rPr lang="en-US" sz="2400" b="1" dirty="0">
+              <a:rPr lang="en-US" sz="2200" b="1" dirty="0">
                 <a:solidFill>
                   <a:srgbClr val="E8ECF4"/>
                 </a:solidFill>
@@ -2963,20 +3345,45 @@
               </a:rPr>
               <a:t>Market Opportunity</a:t>
             </a:r>
-            <a:endParaRPr lang="en-US" sz="2400" dirty="0"/>
-          </a:p>
-        </p:txBody>
-      </p:sp>
-      <p:sp>
-        <p:nvSpPr>
-          <p:cNvPr id="4" name="Text 2"/>
-          <p:cNvSpPr/>
-          <p:nvPr/>
-        </p:nvSpPr>
-        <p:spPr>
-          <a:xfrm>
-            <a:off x="457200" y="1188720"/>
-            <a:ext cx="10424160" cy="4754880"/>
+            <a:endParaRPr lang="en-US" sz="2200" dirty="0"/>
+          </a:p>
+        </p:txBody>
+      </p:sp>
+      <p:sp>
+        <p:nvSpPr>
+          <p:cNvPr id="4" name="Shape 2"/>
+          <p:cNvSpPr/>
+          <p:nvPr/>
+        </p:nvSpPr>
+        <p:spPr>
+          <a:xfrm>
+            <a:off x="441198" y="1463040"/>
+            <a:ext cx="3474720" cy="2926080"/>
+          </a:xfrm>
+          <a:prstGeom prst="rect">
+            <a:avLst/>
+          </a:prstGeom>
+          <a:solidFill>
+            <a:srgbClr val="2D3142"/>
+          </a:solidFill>
+          <a:ln w="19050">
+            <a:solidFill>
+              <a:srgbClr val="4F6EF7"/>
+            </a:solidFill>
+            <a:prstDash val="solid"/>
+          </a:ln>
+        </p:spPr>
+      </p:sp>
+      <p:sp>
+        <p:nvSpPr>
+          <p:cNvPr id="5" name="Text 3"/>
+          <p:cNvSpPr/>
+          <p:nvPr/>
+        </p:nvSpPr>
+        <p:spPr>
+          <a:xfrm>
+            <a:off x="441198" y="1645920"/>
+            <a:ext cx="3474720" cy="1280160"/>
           </a:xfrm>
           <a:prstGeom prst="rect">
             <a:avLst/>
@@ -2985,15 +3392,53 @@
           <a:ln/>
         </p:spPr>
         <p:txBody>
-          <a:bodyPr wrap="square" rtlCol="0" anchor="t"/>
-          <a:lstStyle/>
-          <a:p>
-            <a:pPr marL="342900" indent="-342900">
-              <a:buSzPct val="100000"/>
-              <a:buChar char="•"/>
-            </a:pPr>
-            <a:r>
-              <a:rPr lang="en-US" sz="1600" dirty="0">
+          <a:bodyPr wrap="square" rtlCol="0" anchor="ctr"/>
+          <a:lstStyle/>
+          <a:p>
+            <a:pPr algn="ctr" indent="0" marL="0">
+              <a:buNone/>
+            </a:pPr>
+            <a:r>
+              <a:rPr lang="en-US" sz="4000" b="1" dirty="0">
+                <a:solidFill>
+                  <a:srgbClr val="4F6EF7"/>
+                </a:solidFill>
+                <a:latin typeface="Calibri" pitchFamily="34" charset="0"/>
+                <a:ea typeface="Calibri" pitchFamily="34" charset="-122"/>
+                <a:cs typeface="Calibri" pitchFamily="34" charset="-120"/>
+              </a:rPr>
+              <a:t>${{X}}B</a:t>
+            </a:r>
+            <a:endParaRPr lang="en-US" sz="4000" dirty="0"/>
+          </a:p>
+        </p:txBody>
+      </p:sp>
+      <p:sp>
+        <p:nvSpPr>
+          <p:cNvPr id="6" name="Text 4"/>
+          <p:cNvSpPr/>
+          <p:nvPr/>
+        </p:nvSpPr>
+        <p:spPr>
+          <a:xfrm>
+            <a:off x="441198" y="2926080"/>
+            <a:ext cx="3474720" cy="502920"/>
+          </a:xfrm>
+          <a:prstGeom prst="rect">
+            <a:avLst/>
+          </a:prstGeom>
+          <a:noFill/>
+          <a:ln/>
+        </p:spPr>
+        <p:txBody>
+          <a:bodyPr wrap="square" rtlCol="0" anchor="ctr"/>
+          <a:lstStyle/>
+          <a:p>
+            <a:pPr algn="ctr" indent="0" marL="0">
+              <a:buNone/>
+            </a:pPr>
+            <a:r>
+              <a:rPr lang="en-US" sz="1500" dirty="0">
                 <a:solidFill>
                   <a:srgbClr val="E8ECF4"/>
                 </a:solidFill>
@@ -3001,17 +3446,141 @@
                 <a:ea typeface="Calibri" pitchFamily="34" charset="-122"/>
                 <a:cs typeface="Calibri" pitchFamily="34" charset="-120"/>
               </a:rPr>
-              <a:t>TAM: {{Total addressable market}}</a:t>
-            </a:r>
-            <a:endParaRPr lang="en-US" sz="1600" dirty="0"/>
-          </a:p>
-          <a:p>
-            <a:pPr marL="342900" indent="-342900">
-              <a:buSzPct val="100000"/>
-              <a:buChar char="•"/>
-            </a:pPr>
-            <a:r>
-              <a:rPr lang="en-US" sz="1600" dirty="0">
+              <a:t>TAM</a:t>
+            </a:r>
+            <a:endParaRPr lang="en-US" sz="1500" dirty="0"/>
+          </a:p>
+        </p:txBody>
+      </p:sp>
+      <p:sp>
+        <p:nvSpPr>
+          <p:cNvPr id="7" name="Text 5"/>
+          <p:cNvSpPr/>
+          <p:nvPr/>
+        </p:nvSpPr>
+        <p:spPr>
+          <a:xfrm>
+            <a:off x="441198" y="3429000"/>
+            <a:ext cx="3474720" cy="365760"/>
+          </a:xfrm>
+          <a:prstGeom prst="rect">
+            <a:avLst/>
+          </a:prstGeom>
+          <a:noFill/>
+          <a:ln/>
+        </p:spPr>
+        <p:txBody>
+          <a:bodyPr wrap="square" rtlCol="0" anchor="ctr"/>
+          <a:lstStyle/>
+          <a:p>
+            <a:pPr algn="ctr" indent="0" marL="0">
+              <a:buNone/>
+            </a:pPr>
+            <a:r>
+              <a:rPr lang="en-US" sz="1100" dirty="0">
+                <a:solidFill>
+                  <a:srgbClr val="8892B0"/>
+                </a:solidFill>
+                <a:latin typeface="Calibri" pitchFamily="34" charset="0"/>
+                <a:ea typeface="Calibri" pitchFamily="34" charset="-122"/>
+                <a:cs typeface="Calibri" pitchFamily="34" charset="-120"/>
+              </a:rPr>
+              <a:t>Total addressable market</a:t>
+            </a:r>
+            <a:endParaRPr lang="en-US" sz="1100" dirty="0"/>
+          </a:p>
+        </p:txBody>
+      </p:sp>
+      <p:sp>
+        <p:nvSpPr>
+          <p:cNvPr id="8" name="Shape 6"/>
+          <p:cNvSpPr/>
+          <p:nvPr/>
+        </p:nvSpPr>
+        <p:spPr>
+          <a:xfrm>
+            <a:off x="4357116" y="1463040"/>
+            <a:ext cx="3474720" cy="2926080"/>
+          </a:xfrm>
+          <a:prstGeom prst="rect">
+            <a:avLst/>
+          </a:prstGeom>
+          <a:solidFill>
+            <a:srgbClr val="2D3142"/>
+          </a:solidFill>
+          <a:ln w="19050">
+            <a:solidFill>
+              <a:srgbClr val="4F6EF7"/>
+            </a:solidFill>
+            <a:prstDash val="solid"/>
+          </a:ln>
+        </p:spPr>
+      </p:sp>
+      <p:sp>
+        <p:nvSpPr>
+          <p:cNvPr id="9" name="Text 7"/>
+          <p:cNvSpPr/>
+          <p:nvPr/>
+        </p:nvSpPr>
+        <p:spPr>
+          <a:xfrm>
+            <a:off x="4357116" y="1645920"/>
+            <a:ext cx="3474720" cy="1280160"/>
+          </a:xfrm>
+          <a:prstGeom prst="rect">
+            <a:avLst/>
+          </a:prstGeom>
+          <a:noFill/>
+          <a:ln/>
+        </p:spPr>
+        <p:txBody>
+          <a:bodyPr wrap="square" rtlCol="0" anchor="ctr"/>
+          <a:lstStyle/>
+          <a:p>
+            <a:pPr algn="ctr" indent="0" marL="0">
+              <a:buNone/>
+            </a:pPr>
+            <a:r>
+              <a:rPr lang="en-US" sz="4000" b="1" dirty="0">
+                <a:solidFill>
+                  <a:srgbClr val="4F6EF7"/>
+                </a:solidFill>
+                <a:latin typeface="Calibri" pitchFamily="34" charset="0"/>
+                <a:ea typeface="Calibri" pitchFamily="34" charset="-122"/>
+                <a:cs typeface="Calibri" pitchFamily="34" charset="-120"/>
+              </a:rPr>
+              <a:t>${{Y}}M</a:t>
+            </a:r>
+            <a:endParaRPr lang="en-US" sz="4000" dirty="0"/>
+          </a:p>
+        </p:txBody>
+      </p:sp>
+      <p:sp>
+        <p:nvSpPr>
+          <p:cNvPr id="10" name="Text 8"/>
+          <p:cNvSpPr/>
+          <p:nvPr/>
+        </p:nvSpPr>
+        <p:spPr>
+          <a:xfrm>
+            <a:off x="4357116" y="2926080"/>
+            <a:ext cx="3474720" cy="502920"/>
+          </a:xfrm>
+          <a:prstGeom prst="rect">
+            <a:avLst/>
+          </a:prstGeom>
+          <a:noFill/>
+          <a:ln/>
+        </p:spPr>
+        <p:txBody>
+          <a:bodyPr wrap="square" rtlCol="0" anchor="ctr"/>
+          <a:lstStyle/>
+          <a:p>
+            <a:pPr algn="ctr" indent="0" marL="0">
+              <a:buNone/>
+            </a:pPr>
+            <a:r>
+              <a:rPr lang="en-US" sz="1500" dirty="0">
                 <a:solidFill>
                   <a:srgbClr val="E8ECF4"/>
                 </a:solidFill>
@@ -3019,17 +3588,141 @@
                 <a:ea typeface="Calibri" pitchFamily="34" charset="-122"/>
                 <a:cs typeface="Calibri" pitchFamily="34" charset="-120"/>
               </a:rPr>
-              <a:t>SAM: {{Serviceable market}}</a:t>
-            </a:r>
-            <a:endParaRPr lang="en-US" sz="1600" dirty="0"/>
-          </a:p>
-          <a:p>
-            <a:pPr marL="342900" indent="-342900">
-              <a:buSzPct val="100000"/>
-              <a:buChar char="•"/>
-            </a:pPr>
-            <a:r>
-              <a:rPr lang="en-US" sz="1600" dirty="0">
+              <a:t>SAM</a:t>
+            </a:r>
+            <a:endParaRPr lang="en-US" sz="1500" dirty="0"/>
+          </a:p>
+        </p:txBody>
+      </p:sp>
+      <p:sp>
+        <p:nvSpPr>
+          <p:cNvPr id="11" name="Text 9"/>
+          <p:cNvSpPr/>
+          <p:nvPr/>
+        </p:nvSpPr>
+        <p:spPr>
+          <a:xfrm>
+            <a:off x="4357116" y="3429000"/>
+            <a:ext cx="3474720" cy="365760"/>
+          </a:xfrm>
+          <a:prstGeom prst="rect">
+            <a:avLst/>
+          </a:prstGeom>
+          <a:noFill/>
+          <a:ln/>
+        </p:spPr>
+        <p:txBody>
+          <a:bodyPr wrap="square" rtlCol="0" anchor="ctr"/>
+          <a:lstStyle/>
+          <a:p>
+            <a:pPr algn="ctr" indent="0" marL="0">
+              <a:buNone/>
+            </a:pPr>
+            <a:r>
+              <a:rPr lang="en-US" sz="1100" dirty="0">
+                <a:solidFill>
+                  <a:srgbClr val="8892B0"/>
+                </a:solidFill>
+                <a:latin typeface="Calibri" pitchFamily="34" charset="0"/>
+                <a:ea typeface="Calibri" pitchFamily="34" charset="-122"/>
+                <a:cs typeface="Calibri" pitchFamily="34" charset="-120"/>
+              </a:rPr>
+              <a:t>Serviceable segment</a:t>
+            </a:r>
+            <a:endParaRPr lang="en-US" sz="1100" dirty="0"/>
+          </a:p>
+        </p:txBody>
+      </p:sp>
+      <p:sp>
+        <p:nvSpPr>
+          <p:cNvPr id="12" name="Shape 10"/>
+          <p:cNvSpPr/>
+          <p:nvPr/>
+        </p:nvSpPr>
+        <p:spPr>
+          <a:xfrm>
+            <a:off x="8273034" y="1463040"/>
+            <a:ext cx="3474720" cy="2926080"/>
+          </a:xfrm>
+          <a:prstGeom prst="rect">
+            <a:avLst/>
+          </a:prstGeom>
+          <a:solidFill>
+            <a:srgbClr val="2D3142"/>
+          </a:solidFill>
+          <a:ln w="19050">
+            <a:solidFill>
+              <a:srgbClr val="4F6EF7"/>
+            </a:solidFill>
+            <a:prstDash val="solid"/>
+          </a:ln>
+        </p:spPr>
+      </p:sp>
+      <p:sp>
+        <p:nvSpPr>
+          <p:cNvPr id="13" name="Text 11"/>
+          <p:cNvSpPr/>
+          <p:nvPr/>
+        </p:nvSpPr>
+        <p:spPr>
+          <a:xfrm>
+            <a:off x="8273034" y="1645920"/>
+            <a:ext cx="3474720" cy="1280160"/>
+          </a:xfrm>
+          <a:prstGeom prst="rect">
+            <a:avLst/>
+          </a:prstGeom>
+          <a:noFill/>
+          <a:ln/>
+        </p:spPr>
+        <p:txBody>
+          <a:bodyPr wrap="square" rtlCol="0" anchor="ctr"/>
+          <a:lstStyle/>
+          <a:p>
+            <a:pPr algn="ctr" indent="0" marL="0">
+              <a:buNone/>
+            </a:pPr>
+            <a:r>
+              <a:rPr lang="en-US" sz="4000" b="1" dirty="0">
+                <a:solidFill>
+                  <a:srgbClr val="4F6EF7"/>
+                </a:solidFill>
+                <a:latin typeface="Calibri" pitchFamily="34" charset="0"/>
+                <a:ea typeface="Calibri" pitchFamily="34" charset="-122"/>
+                <a:cs typeface="Calibri" pitchFamily="34" charset="-120"/>
+              </a:rPr>
+              <a:t>${{Z}}M</a:t>
+            </a:r>
+            <a:endParaRPr lang="en-US" sz="4000" dirty="0"/>
+          </a:p>
+        </p:txBody>
+      </p:sp>
+      <p:sp>
+        <p:nvSpPr>
+          <p:cNvPr id="14" name="Text 12"/>
+          <p:cNvSpPr/>
+          <p:nvPr/>
+        </p:nvSpPr>
+        <p:spPr>
+          <a:xfrm>
+            <a:off x="8273034" y="2926080"/>
+            <a:ext cx="3474720" cy="502920"/>
+          </a:xfrm>
+          <a:prstGeom prst="rect">
+            <a:avLst/>
+          </a:prstGeom>
+          <a:noFill/>
+          <a:ln/>
+        </p:spPr>
+        <p:txBody>
+          <a:bodyPr wrap="square" rtlCol="0" anchor="ctr"/>
+          <a:lstStyle/>
+          <a:p>
+            <a:pPr algn="ctr" indent="0" marL="0">
+              <a:buNone/>
+            </a:pPr>
+            <a:r>
+              <a:rPr lang="en-US" sz="1500" dirty="0">
                 <a:solidFill>
                   <a:srgbClr val="E8ECF4"/>
                 </a:solidFill>
@@ -3037,9 +3730,48 @@
                 <a:ea typeface="Calibri" pitchFamily="34" charset="-122"/>
                 <a:cs typeface="Calibri" pitchFamily="34" charset="-120"/>
               </a:rPr>
-              <a:t>SOM: {{Target share}}</a:t>
-            </a:r>
-            <a:endParaRPr lang="en-US" sz="1600" dirty="0"/>
+              <a:t>SOM (Y1)</a:t>
+            </a:r>
+            <a:endParaRPr lang="en-US" sz="1500" dirty="0"/>
+          </a:p>
+        </p:txBody>
+      </p:sp>
+      <p:sp>
+        <p:nvSpPr>
+          <p:cNvPr id="15" name="Text 13"/>
+          <p:cNvSpPr/>
+          <p:nvPr/>
+        </p:nvSpPr>
+        <p:spPr>
+          <a:xfrm>
+            <a:off x="8273034" y="3429000"/>
+            <a:ext cx="3474720" cy="365760"/>
+          </a:xfrm>
+          <a:prstGeom prst="rect">
+            <a:avLst/>
+          </a:prstGeom>
+          <a:noFill/>
+          <a:ln/>
+        </p:spPr>
+        <p:txBody>
+          <a:bodyPr wrap="square" rtlCol="0" anchor="ctr"/>
+          <a:lstStyle/>
+          <a:p>
+            <a:pPr algn="ctr" indent="0" marL="0">
+              <a:buNone/>
+            </a:pPr>
+            <a:r>
+              <a:rPr lang="en-US" sz="1100" dirty="0">
+                <a:solidFill>
+                  <a:srgbClr val="8892B0"/>
+                </a:solidFill>
+                <a:latin typeface="Calibri" pitchFamily="34" charset="0"/>
+                <a:ea typeface="Calibri" pitchFamily="34" charset="-122"/>
+                <a:cs typeface="Calibri" pitchFamily="34" charset="-120"/>
+              </a:rPr>
+              <a:t>{{Go-to-market target}}</a:t>
+            </a:r>
+            <a:endParaRPr lang="en-US" sz="1100" dirty="0"/>
           </a:p>
         </p:txBody>
       </p:sp>
@@ -3077,7 +3809,27 @@
         <p:spPr>
           <a:xfrm>
             <a:off x="0" y="0"/>
-            <a:ext cx="12192000" cy="1005840"/>
+            <a:ext cx="109728" cy="6858000"/>
+          </a:xfrm>
+          <a:prstGeom prst="rect">
+            <a:avLst/>
+          </a:prstGeom>
+          <a:solidFill>
+            <a:srgbClr val="4F6EF7"/>
+          </a:solidFill>
+          <a:ln/>
+        </p:spPr>
+      </p:sp>
+      <p:sp>
+        <p:nvSpPr>
+          <p:cNvPr id="3" name="Shape 1"/>
+          <p:cNvSpPr/>
+          <p:nvPr/>
+        </p:nvSpPr>
+        <p:spPr>
+          <a:xfrm>
+            <a:off x="109728" y="0"/>
+            <a:ext cx="12079224" cy="914400"/>
           </a:xfrm>
           <a:prstGeom prst="rect">
             <a:avLst/>
@@ -3090,14 +3842,14 @@
       </p:sp>
       <p:sp>
         <p:nvSpPr>
-          <p:cNvPr id="3" name="Text 1"/>
-          <p:cNvSpPr/>
-          <p:nvPr/>
-        </p:nvSpPr>
-        <p:spPr>
-          <a:xfrm>
-            <a:off x="365760" y="164592"/>
-            <a:ext cx="10607040" cy="685800"/>
+          <p:cNvPr id="4" name="Text 2"/>
+          <p:cNvSpPr/>
+          <p:nvPr/>
+        </p:nvSpPr>
+        <p:spPr>
+          <a:xfrm>
+            <a:off x="347472" y="109728"/>
+            <a:ext cx="11612880" cy="694944"/>
           </a:xfrm>
           <a:prstGeom prst="rect">
             <a:avLst/>
@@ -3113,7 +3865,7 @@
               <a:buNone/>
             </a:pPr>
             <a:r>
-              <a:rPr lang="en-US" sz="2400" b="1" dirty="0">
+              <a:rPr lang="en-US" sz="2200" b="1" dirty="0">
                 <a:solidFill>
                   <a:srgbClr val="E8ECF4"/>
                 </a:solidFill>
@@ -3121,22 +3873,22 @@
                 <a:ea typeface="Calibri" pitchFamily="34" charset="-122"/>
                 <a:cs typeface="Calibri" pitchFamily="34" charset="-120"/>
               </a:rPr>
-              <a:t>Product Demo</a:t>
-            </a:r>
-            <a:endParaRPr lang="en-US" sz="2400" dirty="0"/>
-          </a:p>
-        </p:txBody>
-      </p:sp>
-      <p:sp>
-        <p:nvSpPr>
-          <p:cNvPr id="4" name="Text 2"/>
-          <p:cNvSpPr/>
-          <p:nvPr/>
-        </p:nvSpPr>
-        <p:spPr>
-          <a:xfrm>
-            <a:off x="457200" y="1188720"/>
-            <a:ext cx="10424160" cy="4754880"/>
+              <a:t>Product Highlights</a:t>
+            </a:r>
+            <a:endParaRPr lang="en-US" sz="2200" dirty="0"/>
+          </a:p>
+        </p:txBody>
+      </p:sp>
+      <p:sp>
+        <p:nvSpPr>
+          <p:cNvPr id="5" name="Text 3"/>
+          <p:cNvSpPr/>
+          <p:nvPr/>
+        </p:nvSpPr>
+        <p:spPr>
+          <a:xfrm>
+            <a:off x="457200" y="1097280"/>
+            <a:ext cx="11430000" cy="5212080"/>
           </a:xfrm>
           <a:prstGeom prst="rect">
             <a:avLst/>
@@ -3148,12 +3900,13 @@
           <a:bodyPr wrap="square" rtlCol="0" anchor="t"/>
           <a:lstStyle/>
           <a:p>
-            <a:pPr marL="342900" indent="-342900">
-              <a:buSzPct val="100000"/>
-              <a:buChar char="•"/>
-            </a:pPr>
-            <a:r>
-              <a:rPr lang="en-US" sz="1600" dirty="0">
+            <a:pPr>
+              <a:spcAft>
+                <a:spcPts val="800"/>
+              </a:spcAft>
+            </a:pPr>
+            <a:r>
+              <a:rPr lang="en-US" sz="1500" dirty="0">
                 <a:solidFill>
                   <a:srgbClr val="E8ECF4"/>
                 </a:solidFill>
@@ -3161,17 +3914,18 @@
                 <a:ea typeface="Calibri" pitchFamily="34" charset="-122"/>
                 <a:cs typeface="Calibri" pitchFamily="34" charset="-120"/>
               </a:rPr>
-              <a:t>{{Key feature 1}}</a:t>
-            </a:r>
-            <a:endParaRPr lang="en-US" sz="1600" dirty="0"/>
-          </a:p>
-          <a:p>
-            <a:pPr marL="342900" indent="-342900">
-              <a:buSzPct val="100000"/>
-              <a:buChar char="•"/>
-            </a:pPr>
-            <a:r>
-              <a:rPr lang="en-US" sz="1600" dirty="0">
+              <a:t>{{Feature 1}}: {{outcome in user-centric language}}</a:t>
+            </a:r>
+            <a:endParaRPr lang="en-US" sz="1500" dirty="0"/>
+          </a:p>
+          <a:p>
+            <a:pPr>
+              <a:spcAft>
+                <a:spcPts val="800"/>
+              </a:spcAft>
+            </a:pPr>
+            <a:r>
+              <a:rPr lang="en-US" sz="1500" dirty="0">
                 <a:solidFill>
                   <a:srgbClr val="E8ECF4"/>
                 </a:solidFill>
@@ -3179,17 +3933,18 @@
                 <a:ea typeface="Calibri" pitchFamily="34" charset="-122"/>
                 <a:cs typeface="Calibri" pitchFamily="34" charset="-120"/>
               </a:rPr>
-              <a:t>{{Key feature 2}}</a:t>
-            </a:r>
-            <a:endParaRPr lang="en-US" sz="1600" dirty="0"/>
-          </a:p>
-          <a:p>
-            <a:pPr marL="342900" indent="-342900">
-              <a:buSzPct val="100000"/>
-              <a:buChar char="•"/>
-            </a:pPr>
-            <a:r>
-              <a:rPr lang="en-US" sz="1600" dirty="0">
+              <a:t>{{Feature 2}}: {{outcome — quantify if possible}}</a:t>
+            </a:r>
+            <a:endParaRPr lang="en-US" sz="1500" dirty="0"/>
+          </a:p>
+          <a:p>
+            <a:pPr>
+              <a:spcAft>
+                <a:spcPts val="800"/>
+              </a:spcAft>
+            </a:pPr>
+            <a:r>
+              <a:rPr lang="en-US" sz="1500" dirty="0">
                 <a:solidFill>
                   <a:srgbClr val="E8ECF4"/>
                 </a:solidFill>
@@ -3197,9 +3952,9 @@
                 <a:ea typeface="Calibri" pitchFamily="34" charset="-122"/>
                 <a:cs typeface="Calibri" pitchFamily="34" charset="-120"/>
               </a:rPr>
-              <a:t>{{Key feature 3}}</a:t>
-            </a:r>
-            <a:endParaRPr lang="en-US" sz="1600" dirty="0"/>
+              <a:t>{{Feature 3}}: {{outcome — how it compares to status quo}}</a:t>
+            </a:r>
+            <a:endParaRPr lang="en-US" sz="1500" dirty="0"/>
           </a:p>
         </p:txBody>
       </p:sp>
@@ -3237,7 +3992,27 @@
         <p:spPr>
           <a:xfrm>
             <a:off x="0" y="0"/>
-            <a:ext cx="12192000" cy="1005840"/>
+            <a:ext cx="109728" cy="6858000"/>
+          </a:xfrm>
+          <a:prstGeom prst="rect">
+            <a:avLst/>
+          </a:prstGeom>
+          <a:solidFill>
+            <a:srgbClr val="4F6EF7"/>
+          </a:solidFill>
+          <a:ln/>
+        </p:spPr>
+      </p:sp>
+      <p:sp>
+        <p:nvSpPr>
+          <p:cNvPr id="3" name="Shape 1"/>
+          <p:cNvSpPr/>
+          <p:nvPr/>
+        </p:nvSpPr>
+        <p:spPr>
+          <a:xfrm>
+            <a:off x="109728" y="0"/>
+            <a:ext cx="12079224" cy="914400"/>
           </a:xfrm>
           <a:prstGeom prst="rect">
             <a:avLst/>
@@ -3250,14 +4025,14 @@
       </p:sp>
       <p:sp>
         <p:nvSpPr>
-          <p:cNvPr id="3" name="Text 1"/>
-          <p:cNvSpPr/>
-          <p:nvPr/>
-        </p:nvSpPr>
-        <p:spPr>
-          <a:xfrm>
-            <a:off x="365760" y="164592"/>
-            <a:ext cx="10607040" cy="685800"/>
+          <p:cNvPr id="4" name="Text 2"/>
+          <p:cNvSpPr/>
+          <p:nvPr/>
+        </p:nvSpPr>
+        <p:spPr>
+          <a:xfrm>
+            <a:off x="347472" y="109728"/>
+            <a:ext cx="11612880" cy="694944"/>
           </a:xfrm>
           <a:prstGeom prst="rect">
             <a:avLst/>
@@ -3273,7 +4048,7 @@
               <a:buNone/>
             </a:pPr>
             <a:r>
-              <a:rPr lang="en-US" sz="2400" b="1" dirty="0">
+              <a:rPr lang="en-US" sz="2200" b="1" dirty="0">
                 <a:solidFill>
                   <a:srgbClr val="E8ECF4"/>
                 </a:solidFill>
@@ -3283,20 +4058,20 @@
               </a:rPr>
               <a:t>Business Model</a:t>
             </a:r>
-            <a:endParaRPr lang="en-US" sz="2400" dirty="0"/>
-          </a:p>
-        </p:txBody>
-      </p:sp>
-      <p:sp>
-        <p:nvSpPr>
-          <p:cNvPr id="4" name="Text 2"/>
-          <p:cNvSpPr/>
-          <p:nvPr/>
-        </p:nvSpPr>
-        <p:spPr>
-          <a:xfrm>
-            <a:off x="457200" y="1188720"/>
-            <a:ext cx="10424160" cy="4754880"/>
+            <a:endParaRPr lang="en-US" sz="2200" dirty="0"/>
+          </a:p>
+        </p:txBody>
+      </p:sp>
+      <p:sp>
+        <p:nvSpPr>
+          <p:cNvPr id="5" name="Text 3"/>
+          <p:cNvSpPr/>
+          <p:nvPr/>
+        </p:nvSpPr>
+        <p:spPr>
+          <a:xfrm>
+            <a:off x="457200" y="1097280"/>
+            <a:ext cx="11430000" cy="5212080"/>
           </a:xfrm>
           <a:prstGeom prst="rect">
             <a:avLst/>
@@ -3308,12 +4083,13 @@
           <a:bodyPr wrap="square" rtlCol="0" anchor="t"/>
           <a:lstStyle/>
           <a:p>
-            <a:pPr marL="342900" indent="-342900">
-              <a:buSzPct val="100000"/>
-              <a:buChar char="•"/>
-            </a:pPr>
-            <a:r>
-              <a:rPr lang="en-US" sz="1600" dirty="0">
+            <a:pPr>
+              <a:spcAft>
+                <a:spcPts val="800"/>
+              </a:spcAft>
+            </a:pPr>
+            <a:r>
+              <a:rPr lang="en-US" sz="1500" dirty="0">
                 <a:solidFill>
                   <a:srgbClr val="E8ECF4"/>
                 </a:solidFill>
@@ -3321,17 +4097,18 @@
                 <a:ea typeface="Calibri" pitchFamily="34" charset="-122"/>
                 <a:cs typeface="Calibri" pitchFamily="34" charset="-120"/>
               </a:rPr>
-              <a:t>Revenue model: {{description}}</a:t>
-            </a:r>
-            <a:endParaRPr lang="en-US" sz="1600" dirty="0"/>
-          </a:p>
-          <a:p>
-            <a:pPr marL="342900" indent="-342900">
-              <a:buSzPct val="100000"/>
-              <a:buChar char="•"/>
-            </a:pPr>
-            <a:r>
-              <a:rPr lang="en-US" sz="1600" dirty="0">
+              <a:t>Revenue model: {{SaaS / usage-based / marketplace / license}}</a:t>
+            </a:r>
+            <a:endParaRPr lang="en-US" sz="1500" dirty="0"/>
+          </a:p>
+          <a:p>
+            <a:pPr>
+              <a:spcAft>
+                <a:spcPts val="800"/>
+              </a:spcAft>
+            </a:pPr>
+            <a:r>
+              <a:rPr lang="en-US" sz="1500" dirty="0">
                 <a:solidFill>
                   <a:srgbClr val="E8ECF4"/>
                 </a:solidFill>
@@ -3339,17 +4116,18 @@
                 <a:ea typeface="Calibri" pitchFamily="34" charset="-122"/>
                 <a:cs typeface="Calibri" pitchFamily="34" charset="-120"/>
               </a:rPr>
-              <a:t>Pricing: {{tiers}}</a:t>
-            </a:r>
-            <a:endParaRPr lang="en-US" sz="1600" dirty="0"/>
-          </a:p>
-          <a:p>
-            <a:pPr marL="342900" indent="-342900">
-              <a:buSzPct val="100000"/>
-              <a:buChar char="•"/>
-            </a:pPr>
-            <a:r>
-              <a:rPr lang="en-US" sz="1600" dirty="0">
+              <a:t>Pricing: {{Tier 1 at $X/mo — Tier 2 at $Y/mo — Enterprise custom}}</a:t>
+            </a:r>
+            <a:endParaRPr lang="en-US" sz="1500" dirty="0"/>
+          </a:p>
+          <a:p>
+            <a:pPr>
+              <a:spcAft>
+                <a:spcPts val="800"/>
+              </a:spcAft>
+            </a:pPr>
+            <a:r>
+              <a:rPr lang="en-US" sz="1500" dirty="0">
                 <a:solidFill>
                   <a:srgbClr val="E8ECF4"/>
                 </a:solidFill>
@@ -3357,9 +4135,9 @@
                 <a:ea typeface="Calibri" pitchFamily="34" charset="-122"/>
                 <a:cs typeface="Calibri" pitchFamily="34" charset="-120"/>
               </a:rPr>
-              <a:t>Unit economics: {{LTV/CAC}}</a:t>
-            </a:r>
-            <a:endParaRPr lang="en-US" sz="1600" dirty="0"/>
+              <a:t>Unit economics: LTV ${{X}} · CAC ${{Y}} · Payback {{N}} months</a:t>
+            </a:r>
+            <a:endParaRPr lang="en-US" sz="1500" dirty="0"/>
           </a:p>
         </p:txBody>
       </p:sp>
@@ -3397,7 +4175,7 @@
         <p:spPr>
           <a:xfrm>
             <a:off x="0" y="0"/>
-            <a:ext cx="12192000" cy="1005840"/>
+            <a:ext cx="12192000" cy="914400"/>
           </a:xfrm>
           <a:prstGeom prst="rect">
             <a:avLst/>
@@ -3416,8 +4194,8 @@
         </p:nvSpPr>
         <p:spPr>
           <a:xfrm>
-            <a:off x="365760" y="164592"/>
-            <a:ext cx="10607040" cy="685800"/>
+            <a:off x="347472" y="109728"/>
+            <a:ext cx="11612880" cy="694944"/>
           </a:xfrm>
           <a:prstGeom prst="rect">
             <a:avLst/>
@@ -3433,7 +4211,7 @@
               <a:buNone/>
             </a:pPr>
             <a:r>
-              <a:rPr lang="en-US" sz="2400" b="1" dirty="0">
+              <a:rPr lang="en-US" sz="2200" b="1" dirty="0">
                 <a:solidFill>
                   <a:srgbClr val="E8ECF4"/>
                 </a:solidFill>
@@ -3443,20 +4221,45 @@
               </a:rPr>
               <a:t>Traction &amp; Validation</a:t>
             </a:r>
-            <a:endParaRPr lang="en-US" sz="2400" dirty="0"/>
-          </a:p>
-        </p:txBody>
-      </p:sp>
-      <p:sp>
-        <p:nvSpPr>
-          <p:cNvPr id="4" name="Text 2"/>
-          <p:cNvSpPr/>
-          <p:nvPr/>
-        </p:nvSpPr>
-        <p:spPr>
-          <a:xfrm>
-            <a:off x="457200" y="1188720"/>
-            <a:ext cx="10424160" cy="4754880"/>
+            <a:endParaRPr lang="en-US" sz="2200" dirty="0"/>
+          </a:p>
+        </p:txBody>
+      </p:sp>
+      <p:sp>
+        <p:nvSpPr>
+          <p:cNvPr id="4" name="Shape 2"/>
+          <p:cNvSpPr/>
+          <p:nvPr/>
+        </p:nvSpPr>
+        <p:spPr>
+          <a:xfrm>
+            <a:off x="441198" y="1463040"/>
+            <a:ext cx="3474720" cy="2926080"/>
+          </a:xfrm>
+          <a:prstGeom prst="rect">
+            <a:avLst/>
+          </a:prstGeom>
+          <a:solidFill>
+            <a:srgbClr val="2D3142"/>
+          </a:solidFill>
+          <a:ln w="19050">
+            <a:solidFill>
+              <a:srgbClr val="4F6EF7"/>
+            </a:solidFill>
+            <a:prstDash val="solid"/>
+          </a:ln>
+        </p:spPr>
+      </p:sp>
+      <p:sp>
+        <p:nvSpPr>
+          <p:cNvPr id="5" name="Text 3"/>
+          <p:cNvSpPr/>
+          <p:nvPr/>
+        </p:nvSpPr>
+        <p:spPr>
+          <a:xfrm>
+            <a:off x="441198" y="1645920"/>
+            <a:ext cx="3474720" cy="1280160"/>
           </a:xfrm>
           <a:prstGeom prst="rect">
             <a:avLst/>
@@ -3465,15 +4268,53 @@
           <a:ln/>
         </p:spPr>
         <p:txBody>
-          <a:bodyPr wrap="square" rtlCol="0" anchor="t"/>
-          <a:lstStyle/>
-          <a:p>
-            <a:pPr marL="342900" indent="-342900">
-              <a:buSzPct val="100000"/>
-              <a:buChar char="•"/>
-            </a:pPr>
-            <a:r>
-              <a:rPr lang="en-US" sz="1600" dirty="0">
+          <a:bodyPr wrap="square" rtlCol="0" anchor="ctr"/>
+          <a:lstStyle/>
+          <a:p>
+            <a:pPr algn="ctr" indent="0" marL="0">
+              <a:buNone/>
+            </a:pPr>
+            <a:r>
+              <a:rPr lang="en-US" sz="4000" b="1" dirty="0">
+                <a:solidFill>
+                  <a:srgbClr val="4F6EF7"/>
+                </a:solidFill>
+                <a:latin typeface="Calibri" pitchFamily="34" charset="0"/>
+                <a:ea typeface="Calibri" pitchFamily="34" charset="-122"/>
+                <a:cs typeface="Calibri" pitchFamily="34" charset="-120"/>
+              </a:rPr>
+              <a:t>{{X}}</a:t>
+            </a:r>
+            <a:endParaRPr lang="en-US" sz="4000" dirty="0"/>
+          </a:p>
+        </p:txBody>
+      </p:sp>
+      <p:sp>
+        <p:nvSpPr>
+          <p:cNvPr id="6" name="Text 4"/>
+          <p:cNvSpPr/>
+          <p:nvPr/>
+        </p:nvSpPr>
+        <p:spPr>
+          <a:xfrm>
+            <a:off x="441198" y="2926080"/>
+            <a:ext cx="3474720" cy="502920"/>
+          </a:xfrm>
+          <a:prstGeom prst="rect">
+            <a:avLst/>
+          </a:prstGeom>
+          <a:noFill/>
+          <a:ln/>
+        </p:spPr>
+        <p:txBody>
+          <a:bodyPr wrap="square" rtlCol="0" anchor="ctr"/>
+          <a:lstStyle/>
+          <a:p>
+            <a:pPr algn="ctr" indent="0" marL="0">
+              <a:buNone/>
+            </a:pPr>
+            <a:r>
+              <a:rPr lang="en-US" sz="1500" dirty="0">
                 <a:solidFill>
                   <a:srgbClr val="E8ECF4"/>
                 </a:solidFill>
@@ -3481,17 +4322,141 @@
                 <a:ea typeface="Calibri" pitchFamily="34" charset="-122"/>
                 <a:cs typeface="Calibri" pitchFamily="34" charset="-120"/>
               </a:rPr>
-              <a:t>{{Metric 1}}: {{value}}</a:t>
-            </a:r>
-            <a:endParaRPr lang="en-US" sz="1600" dirty="0"/>
-          </a:p>
-          <a:p>
-            <a:pPr marL="342900" indent="-342900">
-              <a:buSzPct val="100000"/>
-              <a:buChar char="•"/>
-            </a:pPr>
-            <a:r>
-              <a:rPr lang="en-US" sz="1600" dirty="0">
+              <a:t>{{Key metric e.g. Active Users}}</a:t>
+            </a:r>
+            <a:endParaRPr lang="en-US" sz="1500" dirty="0"/>
+          </a:p>
+        </p:txBody>
+      </p:sp>
+      <p:sp>
+        <p:nvSpPr>
+          <p:cNvPr id="7" name="Text 5"/>
+          <p:cNvSpPr/>
+          <p:nvPr/>
+        </p:nvSpPr>
+        <p:spPr>
+          <a:xfrm>
+            <a:off x="441198" y="3429000"/>
+            <a:ext cx="3474720" cy="365760"/>
+          </a:xfrm>
+          <a:prstGeom prst="rect">
+            <a:avLst/>
+          </a:prstGeom>
+          <a:noFill/>
+          <a:ln/>
+        </p:spPr>
+        <p:txBody>
+          <a:bodyPr wrap="square" rtlCol="0" anchor="ctr"/>
+          <a:lstStyle/>
+          <a:p>
+            <a:pPr algn="ctr" indent="0" marL="0">
+              <a:buNone/>
+            </a:pPr>
+            <a:r>
+              <a:rPr lang="en-US" sz="1100" dirty="0">
+                <a:solidFill>
+                  <a:srgbClr val="8892B0"/>
+                </a:solidFill>
+                <a:latin typeface="Calibri" pitchFamily="34" charset="0"/>
+                <a:ea typeface="Calibri" pitchFamily="34" charset="-122"/>
+                <a:cs typeface="Calibri" pitchFamily="34" charset="-120"/>
+              </a:rPr>
+              <a:t>{{Growth rate}}</a:t>
+            </a:r>
+            <a:endParaRPr lang="en-US" sz="1100" dirty="0"/>
+          </a:p>
+        </p:txBody>
+      </p:sp>
+      <p:sp>
+        <p:nvSpPr>
+          <p:cNvPr id="8" name="Shape 6"/>
+          <p:cNvSpPr/>
+          <p:nvPr/>
+        </p:nvSpPr>
+        <p:spPr>
+          <a:xfrm>
+            <a:off x="4357116" y="1463040"/>
+            <a:ext cx="3474720" cy="2926080"/>
+          </a:xfrm>
+          <a:prstGeom prst="rect">
+            <a:avLst/>
+          </a:prstGeom>
+          <a:solidFill>
+            <a:srgbClr val="2D3142"/>
+          </a:solidFill>
+          <a:ln w="19050">
+            <a:solidFill>
+              <a:srgbClr val="4F6EF7"/>
+            </a:solidFill>
+            <a:prstDash val="solid"/>
+          </a:ln>
+        </p:spPr>
+      </p:sp>
+      <p:sp>
+        <p:nvSpPr>
+          <p:cNvPr id="9" name="Text 7"/>
+          <p:cNvSpPr/>
+          <p:nvPr/>
+        </p:nvSpPr>
+        <p:spPr>
+          <a:xfrm>
+            <a:off x="4357116" y="1645920"/>
+            <a:ext cx="3474720" cy="1280160"/>
+          </a:xfrm>
+          <a:prstGeom prst="rect">
+            <a:avLst/>
+          </a:prstGeom>
+          <a:noFill/>
+          <a:ln/>
+        </p:spPr>
+        <p:txBody>
+          <a:bodyPr wrap="square" rtlCol="0" anchor="ctr"/>
+          <a:lstStyle/>
+          <a:p>
+            <a:pPr algn="ctr" indent="0" marL="0">
+              <a:buNone/>
+            </a:pPr>
+            <a:r>
+              <a:rPr lang="en-US" sz="4000" b="1" dirty="0">
+                <a:solidFill>
+                  <a:srgbClr val="4F6EF7"/>
+                </a:solidFill>
+                <a:latin typeface="Calibri" pitchFamily="34" charset="0"/>
+                <a:ea typeface="Calibri" pitchFamily="34" charset="-122"/>
+                <a:cs typeface="Calibri" pitchFamily="34" charset="-120"/>
+              </a:rPr>
+              <a:t>${{Y}}K</a:t>
+            </a:r>
+            <a:endParaRPr lang="en-US" sz="4000" dirty="0"/>
+          </a:p>
+        </p:txBody>
+      </p:sp>
+      <p:sp>
+        <p:nvSpPr>
+          <p:cNvPr id="10" name="Text 8"/>
+          <p:cNvSpPr/>
+          <p:nvPr/>
+        </p:nvSpPr>
+        <p:spPr>
+          <a:xfrm>
+            <a:off x="4357116" y="2926080"/>
+            <a:ext cx="3474720" cy="502920"/>
+          </a:xfrm>
+          <a:prstGeom prst="rect">
+            <a:avLst/>
+          </a:prstGeom>
+          <a:noFill/>
+          <a:ln/>
+        </p:spPr>
+        <p:txBody>
+          <a:bodyPr wrap="square" rtlCol="0" anchor="ctr"/>
+          <a:lstStyle/>
+          <a:p>
+            <a:pPr algn="ctr" indent="0" marL="0">
+              <a:buNone/>
+            </a:pPr>
+            <a:r>
+              <a:rPr lang="en-US" sz="1500" dirty="0">
                 <a:solidFill>
                   <a:srgbClr val="E8ECF4"/>
                 </a:solidFill>
@@ -3499,17 +4464,141 @@
                 <a:ea typeface="Calibri" pitchFamily="34" charset="-122"/>
                 <a:cs typeface="Calibri" pitchFamily="34" charset="-120"/>
               </a:rPr>
-              <a:t>{{Metric 2}}: {{value}}</a:t>
-            </a:r>
-            <a:endParaRPr lang="en-US" sz="1600" dirty="0"/>
-          </a:p>
-          <a:p>
-            <a:pPr marL="342900" indent="-342900">
-              <a:buSzPct val="100000"/>
-              <a:buChar char="•"/>
-            </a:pPr>
-            <a:r>
-              <a:rPr lang="en-US" sz="1600" dirty="0">
+              <a:t>ARR / MRR</a:t>
+            </a:r>
+            <a:endParaRPr lang="en-US" sz="1500" dirty="0"/>
+          </a:p>
+        </p:txBody>
+      </p:sp>
+      <p:sp>
+        <p:nvSpPr>
+          <p:cNvPr id="11" name="Text 9"/>
+          <p:cNvSpPr/>
+          <p:nvPr/>
+        </p:nvSpPr>
+        <p:spPr>
+          <a:xfrm>
+            <a:off x="4357116" y="3429000"/>
+            <a:ext cx="3474720" cy="365760"/>
+          </a:xfrm>
+          <a:prstGeom prst="rect">
+            <a:avLst/>
+          </a:prstGeom>
+          <a:noFill/>
+          <a:ln/>
+        </p:spPr>
+        <p:txBody>
+          <a:bodyPr wrap="square" rtlCol="0" anchor="ctr"/>
+          <a:lstStyle/>
+          <a:p>
+            <a:pPr algn="ctr" indent="0" marL="0">
+              <a:buNone/>
+            </a:pPr>
+            <a:r>
+              <a:rPr lang="en-US" sz="1100" dirty="0">
+                <a:solidFill>
+                  <a:srgbClr val="8892B0"/>
+                </a:solidFill>
+                <a:latin typeface="Calibri" pitchFamily="34" charset="0"/>
+                <a:ea typeface="Calibri" pitchFamily="34" charset="-122"/>
+                <a:cs typeface="Calibri" pitchFamily="34" charset="-120"/>
+              </a:rPr>
+              <a:t>{{MoM growth %}}</a:t>
+            </a:r>
+            <a:endParaRPr lang="en-US" sz="1100" dirty="0"/>
+          </a:p>
+        </p:txBody>
+      </p:sp>
+      <p:sp>
+        <p:nvSpPr>
+          <p:cNvPr id="12" name="Shape 10"/>
+          <p:cNvSpPr/>
+          <p:nvPr/>
+        </p:nvSpPr>
+        <p:spPr>
+          <a:xfrm>
+            <a:off x="8273034" y="1463040"/>
+            <a:ext cx="3474720" cy="2926080"/>
+          </a:xfrm>
+          <a:prstGeom prst="rect">
+            <a:avLst/>
+          </a:prstGeom>
+          <a:solidFill>
+            <a:srgbClr val="2D3142"/>
+          </a:solidFill>
+          <a:ln w="19050">
+            <a:solidFill>
+              <a:srgbClr val="4F6EF7"/>
+            </a:solidFill>
+            <a:prstDash val="solid"/>
+          </a:ln>
+        </p:spPr>
+      </p:sp>
+      <p:sp>
+        <p:nvSpPr>
+          <p:cNvPr id="13" name="Text 11"/>
+          <p:cNvSpPr/>
+          <p:nvPr/>
+        </p:nvSpPr>
+        <p:spPr>
+          <a:xfrm>
+            <a:off x="8273034" y="1645920"/>
+            <a:ext cx="3474720" cy="1280160"/>
+          </a:xfrm>
+          <a:prstGeom prst="rect">
+            <a:avLst/>
+          </a:prstGeom>
+          <a:noFill/>
+          <a:ln/>
+        </p:spPr>
+        <p:txBody>
+          <a:bodyPr wrap="square" rtlCol="0" anchor="ctr"/>
+          <a:lstStyle/>
+          <a:p>
+            <a:pPr algn="ctr" indent="0" marL="0">
+              <a:buNone/>
+            </a:pPr>
+            <a:r>
+              <a:rPr lang="en-US" sz="4000" b="1" dirty="0">
+                <a:solidFill>
+                  <a:srgbClr val="4F6EF7"/>
+                </a:solidFill>
+                <a:latin typeface="Calibri" pitchFamily="34" charset="0"/>
+                <a:ea typeface="Calibri" pitchFamily="34" charset="-122"/>
+                <a:cs typeface="Calibri" pitchFamily="34" charset="-120"/>
+              </a:rPr>
+              <a:t>{{N}}</a:t>
+            </a:r>
+            <a:endParaRPr lang="en-US" sz="4000" dirty="0"/>
+          </a:p>
+        </p:txBody>
+      </p:sp>
+      <p:sp>
+        <p:nvSpPr>
+          <p:cNvPr id="14" name="Text 12"/>
+          <p:cNvSpPr/>
+          <p:nvPr/>
+        </p:nvSpPr>
+        <p:spPr>
+          <a:xfrm>
+            <a:off x="8273034" y="2926080"/>
+            <a:ext cx="3474720" cy="502920"/>
+          </a:xfrm>
+          <a:prstGeom prst="rect">
+            <a:avLst/>
+          </a:prstGeom>
+          <a:noFill/>
+          <a:ln/>
+        </p:spPr>
+        <p:txBody>
+          <a:bodyPr wrap="square" rtlCol="0" anchor="ctr"/>
+          <a:lstStyle/>
+          <a:p>
+            <a:pPr algn="ctr" indent="0" marL="0">
+              <a:buNone/>
+            </a:pPr>
+            <a:r>
+              <a:rPr lang="en-US" sz="1500" dirty="0">
                 <a:solidFill>
                   <a:srgbClr val="E8ECF4"/>
                 </a:solidFill>
@@ -3517,9 +4606,48 @@
                 <a:ea typeface="Calibri" pitchFamily="34" charset="-122"/>
                 <a:cs typeface="Calibri" pitchFamily="34" charset="-120"/>
               </a:rPr>
-              <a:t>{{Customer proof point}}</a:t>
-            </a:r>
-            <a:endParaRPr lang="en-US" sz="1600" dirty="0"/>
+              <a:t>Customers</a:t>
+            </a:r>
+            <a:endParaRPr lang="en-US" sz="1500" dirty="0"/>
+          </a:p>
+        </p:txBody>
+      </p:sp>
+      <p:sp>
+        <p:nvSpPr>
+          <p:cNvPr id="15" name="Text 13"/>
+          <p:cNvSpPr/>
+          <p:nvPr/>
+        </p:nvSpPr>
+        <p:spPr>
+          <a:xfrm>
+            <a:off x="8273034" y="3429000"/>
+            <a:ext cx="3474720" cy="365760"/>
+          </a:xfrm>
+          <a:prstGeom prst="rect">
+            <a:avLst/>
+          </a:prstGeom>
+          <a:noFill/>
+          <a:ln/>
+        </p:spPr>
+        <p:txBody>
+          <a:bodyPr wrap="square" rtlCol="0" anchor="ctr"/>
+          <a:lstStyle/>
+          <a:p>
+            <a:pPr algn="ctr" indent="0" marL="0">
+              <a:buNone/>
+            </a:pPr>
+            <a:r>
+              <a:rPr lang="en-US" sz="1100" dirty="0">
+                <a:solidFill>
+                  <a:srgbClr val="8892B0"/>
+                </a:solidFill>
+                <a:latin typeface="Calibri" pitchFamily="34" charset="0"/>
+                <a:ea typeface="Calibri" pitchFamily="34" charset="-122"/>
+                <a:cs typeface="Calibri" pitchFamily="34" charset="-120"/>
+              </a:rPr>
+              <a:t>{{Notable logos}}</a:t>
+            </a:r>
+            <a:endParaRPr lang="en-US" sz="1100" dirty="0"/>
           </a:p>
         </p:txBody>
       </p:sp>
@@ -3557,7 +4685,7 @@
         <p:spPr>
           <a:xfrm>
             <a:off x="0" y="0"/>
-            <a:ext cx="12192000" cy="1005840"/>
+            <a:ext cx="12192000" cy="914400"/>
           </a:xfrm>
           <a:prstGeom prst="rect">
             <a:avLst/>
@@ -3576,8 +4704,8 @@
         </p:nvSpPr>
         <p:spPr>
           <a:xfrm>
-            <a:off x="365760" y="164592"/>
-            <a:ext cx="10607040" cy="685800"/>
+            <a:off x="347472" y="109728"/>
+            <a:ext cx="11612880" cy="694944"/>
           </a:xfrm>
           <a:prstGeom prst="rect">
             <a:avLst/>
@@ -3593,7 +4721,7 @@
               <a:buNone/>
             </a:pPr>
             <a:r>
-              <a:rPr lang="en-US" sz="2400" b="1" dirty="0">
+              <a:rPr lang="en-US" sz="2200" b="1" dirty="0">
                 <a:solidFill>
                   <a:srgbClr val="E8ECF4"/>
                 </a:solidFill>
@@ -3603,20 +4731,40 @@
               </a:rPr>
               <a:t>Competitive Landscape</a:t>
             </a:r>
-            <a:endParaRPr lang="en-US" sz="2400" dirty="0"/>
-          </a:p>
-        </p:txBody>
-      </p:sp>
-      <p:sp>
-        <p:nvSpPr>
-          <p:cNvPr id="4" name="Text 2"/>
-          <p:cNvSpPr/>
-          <p:nvPr/>
-        </p:nvSpPr>
-        <p:spPr>
-          <a:xfrm>
-            <a:off x="457200" y="1188720"/>
-            <a:ext cx="10424160" cy="4754880"/>
+            <a:endParaRPr lang="en-US" sz="2200" dirty="0"/>
+          </a:p>
+        </p:txBody>
+      </p:sp>
+      <p:sp>
+        <p:nvSpPr>
+          <p:cNvPr id="4" name="Shape 2"/>
+          <p:cNvSpPr/>
+          <p:nvPr/>
+        </p:nvSpPr>
+        <p:spPr>
+          <a:xfrm>
+            <a:off x="5989320" y="1051560"/>
+            <a:ext cx="36576" cy="5303520"/>
+          </a:xfrm>
+          <a:prstGeom prst="rect">
+            <a:avLst/>
+          </a:prstGeom>
+          <a:solidFill>
+            <a:srgbClr val="5A637A"/>
+          </a:solidFill>
+          <a:ln/>
+        </p:spPr>
+      </p:sp>
+      <p:sp>
+        <p:nvSpPr>
+          <p:cNvPr id="5" name="Text 3"/>
+          <p:cNvSpPr/>
+          <p:nvPr/>
+        </p:nvSpPr>
+        <p:spPr>
+          <a:xfrm>
+            <a:off x="347472" y="1051560"/>
+            <a:ext cx="5486400" cy="411480"/>
           </a:xfrm>
           <a:prstGeom prst="rect">
             <a:avLst/>
@@ -3625,15 +4773,57 @@
           <a:ln/>
         </p:spPr>
         <p:txBody>
+          <a:bodyPr wrap="square" rtlCol="0" anchor="ctr"/>
+          <a:lstStyle/>
+          <a:p>
+            <a:pPr indent="0" marL="0">
+              <a:buNone/>
+            </a:pPr>
+            <a:r>
+              <a:rPr lang="en-US" sz="1300" b="1" dirty="0">
+                <a:solidFill>
+                  <a:srgbClr val="4F6EF7"/>
+                </a:solidFill>
+                <a:latin typeface="Calibri" pitchFamily="34" charset="0"/>
+                <a:ea typeface="Calibri" pitchFamily="34" charset="-122"/>
+                <a:cs typeface="Calibri" pitchFamily="34" charset="-120"/>
+              </a:rPr>
+              <a:t>Competitors</a:t>
+            </a:r>
+            <a:endParaRPr lang="en-US" sz="1300" dirty="0"/>
+          </a:p>
+        </p:txBody>
+      </p:sp>
+      <p:sp>
+        <p:nvSpPr>
+          <p:cNvPr id="6" name="Text 4"/>
+          <p:cNvSpPr/>
+          <p:nvPr/>
+        </p:nvSpPr>
+        <p:spPr>
+          <a:xfrm>
+            <a:off x="347472" y="1554480"/>
+            <a:ext cx="5486400" cy="4572000"/>
+          </a:xfrm>
+          <a:prstGeom prst="rect">
+            <a:avLst/>
+          </a:prstGeom>
+          <a:noFill/>
+          <a:ln/>
+        </p:spPr>
+        <p:txBody>
           <a:bodyPr wrap="square" rtlCol="0" anchor="t"/>
           <a:lstStyle/>
           <a:p>
             <a:pPr marL="342900" indent="-342900">
+              <a:spcAft>
+                <a:spcPts val="700"/>
+              </a:spcAft>
               <a:buSzPct val="100000"/>
               <a:buChar char="•"/>
             </a:pPr>
             <a:r>
-              <a:rPr lang="en-US" sz="1600" dirty="0">
+              <a:rPr lang="en-US" sz="1400" dirty="0">
                 <a:solidFill>
                   <a:srgbClr val="E8ECF4"/>
                 </a:solidFill>
@@ -3641,17 +4831,20 @@
                 <a:ea typeface="Calibri" pitchFamily="34" charset="-122"/>
                 <a:cs typeface="Calibri" pitchFamily="34" charset="-120"/>
               </a:rPr>
-              <a:t>{{Competitor 1}} — {{weakness}}</a:t>
-            </a:r>
-            <a:endParaRPr lang="en-US" sz="1600" dirty="0"/>
+              <a:t>{{Competitor A}} — {{key weakness}}</a:t>
+            </a:r>
+            <a:endParaRPr lang="en-US" sz="1400" dirty="0"/>
           </a:p>
           <a:p>
             <a:pPr marL="342900" indent="-342900">
+              <a:spcAft>
+                <a:spcPts val="700"/>
+              </a:spcAft>
               <a:buSzPct val="100000"/>
               <a:buChar char="•"/>
             </a:pPr>
             <a:r>
-              <a:rPr lang="en-US" sz="1600" dirty="0">
+              <a:rPr lang="en-US" sz="1400" dirty="0">
                 <a:solidFill>
                   <a:srgbClr val="E8ECF4"/>
                 </a:solidFill>
@@ -3659,17 +4852,20 @@
                 <a:ea typeface="Calibri" pitchFamily="34" charset="-122"/>
                 <a:cs typeface="Calibri" pitchFamily="34" charset="-120"/>
               </a:rPr>
-              <a:t>{{Competitor 2}} — {{weakness}}</a:t>
-            </a:r>
-            <a:endParaRPr lang="en-US" sz="1600" dirty="0"/>
+              <a:t>{{Competitor B}} — {{key weakness}}</a:t>
+            </a:r>
+            <a:endParaRPr lang="en-US" sz="1400" dirty="0"/>
           </a:p>
           <a:p>
             <a:pPr marL="342900" indent="-342900">
+              <a:spcAft>
+                <a:spcPts val="700"/>
+              </a:spcAft>
               <a:buSzPct val="100000"/>
               <a:buChar char="•"/>
             </a:pPr>
             <a:r>
-              <a:rPr lang="en-US" sz="1600" dirty="0">
+              <a:rPr lang="en-US" sz="1400" dirty="0">
                 <a:solidFill>
                   <a:srgbClr val="E8ECF4"/>
                 </a:solidFill>
@@ -3677,9 +4873,133 @@
                 <a:ea typeface="Calibri" pitchFamily="34" charset="-122"/>
                 <a:cs typeface="Calibri" pitchFamily="34" charset="-120"/>
               </a:rPr>
-              <a:t>Our advantage: {{differentiator}}</a:t>
-            </a:r>
-            <a:endParaRPr lang="en-US" sz="1600" dirty="0"/>
+              <a:t>{{Status quo}} — {{why it fails}}</a:t>
+            </a:r>
+            <a:endParaRPr lang="en-US" sz="1400" dirty="0"/>
+          </a:p>
+        </p:txBody>
+      </p:sp>
+      <p:sp>
+        <p:nvSpPr>
+          <p:cNvPr id="7" name="Text 5"/>
+          <p:cNvSpPr/>
+          <p:nvPr/>
+        </p:nvSpPr>
+        <p:spPr>
+          <a:xfrm>
+            <a:off x="6309360" y="1051560"/>
+            <a:ext cx="5486400" cy="411480"/>
+          </a:xfrm>
+          <a:prstGeom prst="rect">
+            <a:avLst/>
+          </a:prstGeom>
+          <a:noFill/>
+          <a:ln/>
+        </p:spPr>
+        <p:txBody>
+          <a:bodyPr wrap="square" rtlCol="0" anchor="ctr"/>
+          <a:lstStyle/>
+          <a:p>
+            <a:pPr indent="0" marL="0">
+              <a:buNone/>
+            </a:pPr>
+            <a:r>
+              <a:rPr lang="en-US" sz="1300" b="1" dirty="0">
+                <a:solidFill>
+                  <a:srgbClr val="4F6EF7"/>
+                </a:solidFill>
+                <a:latin typeface="Calibri" pitchFamily="34" charset="0"/>
+                <a:ea typeface="Calibri" pitchFamily="34" charset="-122"/>
+                <a:cs typeface="Calibri" pitchFamily="34" charset="-120"/>
+              </a:rPr>
+              <a:t>Our Advantage</a:t>
+            </a:r>
+            <a:endParaRPr lang="en-US" sz="1300" dirty="0"/>
+          </a:p>
+        </p:txBody>
+      </p:sp>
+      <p:sp>
+        <p:nvSpPr>
+          <p:cNvPr id="8" name="Text 6"/>
+          <p:cNvSpPr/>
+          <p:nvPr/>
+        </p:nvSpPr>
+        <p:spPr>
+          <a:xfrm>
+            <a:off x="6309360" y="1554480"/>
+            <a:ext cx="5486400" cy="4572000"/>
+          </a:xfrm>
+          <a:prstGeom prst="rect">
+            <a:avLst/>
+          </a:prstGeom>
+          <a:noFill/>
+          <a:ln/>
+        </p:spPr>
+        <p:txBody>
+          <a:bodyPr wrap="square" rtlCol="0" anchor="t"/>
+          <a:lstStyle/>
+          <a:p>
+            <a:pPr marL="342900" indent="-342900">
+              <a:spcAft>
+                <a:spcPts val="700"/>
+              </a:spcAft>
+              <a:buSzPct val="100000"/>
+              <a:buChar char="•"/>
+            </a:pPr>
+            <a:r>
+              <a:rPr lang="en-US" sz="1400" dirty="0">
+                <a:solidFill>
+                  <a:srgbClr val="E8ECF4"/>
+                </a:solidFill>
+                <a:latin typeface="Calibri" pitchFamily="34" charset="0"/>
+                <a:ea typeface="Calibri" pitchFamily="34" charset="-122"/>
+                <a:cs typeface="Calibri" pitchFamily="34" charset="-120"/>
+              </a:rPr>
+              <a:t>{{Differentiator 1}}: {{why it matters}}</a:t>
+            </a:r>
+            <a:endParaRPr lang="en-US" sz="1400" dirty="0"/>
+          </a:p>
+          <a:p>
+            <a:pPr marL="342900" indent="-342900">
+              <a:spcAft>
+                <a:spcPts val="700"/>
+              </a:spcAft>
+              <a:buSzPct val="100000"/>
+              <a:buChar char="•"/>
+            </a:pPr>
+            <a:r>
+              <a:rPr lang="en-US" sz="1400" dirty="0">
+                <a:solidFill>
+                  <a:srgbClr val="E8ECF4"/>
+                </a:solidFill>
+                <a:latin typeface="Calibri" pitchFamily="34" charset="0"/>
+                <a:ea typeface="Calibri" pitchFamily="34" charset="-122"/>
+                <a:cs typeface="Calibri" pitchFamily="34" charset="-120"/>
+              </a:rPr>
+              <a:t>{{Differentiator 2}}: {{moat or defensibility}}</a:t>
+            </a:r>
+            <a:endParaRPr lang="en-US" sz="1400" dirty="0"/>
+          </a:p>
+          <a:p>
+            <a:pPr marL="342900" indent="-342900">
+              <a:spcAft>
+                <a:spcPts val="700"/>
+              </a:spcAft>
+              <a:buSzPct val="100000"/>
+              <a:buChar char="•"/>
+            </a:pPr>
+            <a:r>
+              <a:rPr lang="en-US" sz="1400" dirty="0">
+                <a:solidFill>
+                  <a:srgbClr val="E8ECF4"/>
+                </a:solidFill>
+                <a:latin typeface="Calibri" pitchFamily="34" charset="0"/>
+                <a:ea typeface="Calibri" pitchFamily="34" charset="-122"/>
+                <a:cs typeface="Calibri" pitchFamily="34" charset="-120"/>
+              </a:rPr>
+              <a:t>{{Differentiator 3}}: {{network effect / IP / switching cost}}</a:t>
+            </a:r>
+            <a:endParaRPr lang="en-US" sz="1400" dirty="0"/>
           </a:p>
         </p:txBody>
       </p:sp>
@@ -3717,7 +5037,27 @@
         <p:spPr>
           <a:xfrm>
             <a:off x="0" y="0"/>
-            <a:ext cx="12192000" cy="1005840"/>
+            <a:ext cx="109728" cy="6858000"/>
+          </a:xfrm>
+          <a:prstGeom prst="rect">
+            <a:avLst/>
+          </a:prstGeom>
+          <a:solidFill>
+            <a:srgbClr val="4F6EF7"/>
+          </a:solidFill>
+          <a:ln/>
+        </p:spPr>
+      </p:sp>
+      <p:sp>
+        <p:nvSpPr>
+          <p:cNvPr id="3" name="Shape 1"/>
+          <p:cNvSpPr/>
+          <p:nvPr/>
+        </p:nvSpPr>
+        <p:spPr>
+          <a:xfrm>
+            <a:off x="109728" y="0"/>
+            <a:ext cx="12079224" cy="914400"/>
           </a:xfrm>
           <a:prstGeom prst="rect">
             <a:avLst/>
@@ -3730,14 +5070,14 @@
       </p:sp>
       <p:sp>
         <p:nvSpPr>
-          <p:cNvPr id="3" name="Text 1"/>
-          <p:cNvSpPr/>
-          <p:nvPr/>
-        </p:nvSpPr>
-        <p:spPr>
-          <a:xfrm>
-            <a:off x="365760" y="164592"/>
-            <a:ext cx="10607040" cy="685800"/>
+          <p:cNvPr id="4" name="Text 2"/>
+          <p:cNvSpPr/>
+          <p:nvPr/>
+        </p:nvSpPr>
+        <p:spPr>
+          <a:xfrm>
+            <a:off x="347472" y="109728"/>
+            <a:ext cx="11612880" cy="694944"/>
           </a:xfrm>
           <a:prstGeom prst="rect">
             <a:avLst/>
@@ -3753,7 +5093,7 @@
               <a:buNone/>
             </a:pPr>
             <a:r>
-              <a:rPr lang="en-US" sz="2400" b="1" dirty="0">
+              <a:rPr lang="en-US" sz="2200" b="1" dirty="0">
                 <a:solidFill>
                   <a:srgbClr val="E8ECF4"/>
                 </a:solidFill>
@@ -3763,20 +5103,20 @@
               </a:rPr>
               <a:t>Team</a:t>
             </a:r>
-            <a:endParaRPr lang="en-US" sz="2400" dirty="0"/>
-          </a:p>
-        </p:txBody>
-      </p:sp>
-      <p:sp>
-        <p:nvSpPr>
-          <p:cNvPr id="4" name="Text 2"/>
-          <p:cNvSpPr/>
-          <p:nvPr/>
-        </p:nvSpPr>
-        <p:spPr>
-          <a:xfrm>
-            <a:off x="457200" y="1188720"/>
-            <a:ext cx="10424160" cy="4754880"/>
+            <a:endParaRPr lang="en-US" sz="2200" dirty="0"/>
+          </a:p>
+        </p:txBody>
+      </p:sp>
+      <p:sp>
+        <p:nvSpPr>
+          <p:cNvPr id="5" name="Text 3"/>
+          <p:cNvSpPr/>
+          <p:nvPr/>
+        </p:nvSpPr>
+        <p:spPr>
+          <a:xfrm>
+            <a:off x="457200" y="1097280"/>
+            <a:ext cx="11430000" cy="5212080"/>
           </a:xfrm>
           <a:prstGeom prst="rect">
             <a:avLst/>
@@ -3788,12 +5128,13 @@
           <a:bodyPr wrap="square" rtlCol="0" anchor="t"/>
           <a:lstStyle/>
           <a:p>
-            <a:pPr marL="342900" indent="-342900">
-              <a:buSzPct val="100000"/>
-              <a:buChar char="•"/>
-            </a:pPr>
-            <a:r>
-              <a:rPr lang="en-US" sz="1600" dirty="0">
+            <a:pPr>
+              <a:spcAft>
+                <a:spcPts val="800"/>
+              </a:spcAft>
+            </a:pPr>
+            <a:r>
+              <a:rPr lang="en-US" sz="1500" dirty="0">
                 <a:solidFill>
                   <a:srgbClr val="E8ECF4"/>
                 </a:solidFill>
@@ -3801,17 +5142,18 @@
                 <a:ea typeface="Calibri" pitchFamily="34" charset="-122"/>
                 <a:cs typeface="Calibri" pitchFamily="34" charset="-120"/>
               </a:rPr>
-              <a:t>{{Name}} — {{Role, background}}</a:t>
-            </a:r>
-            <a:endParaRPr lang="en-US" sz="1600" dirty="0"/>
-          </a:p>
-          <a:p>
-            <a:pPr marL="342900" indent="-342900">
-              <a:buSzPct val="100000"/>
-              <a:buChar char="•"/>
-            </a:pPr>
-            <a:r>
-              <a:rPr lang="en-US" sz="1600" dirty="0">
+              <a:t>{{Founder/CEO}} — {{1-line background: domain expertise + prior outcome}}</a:t>
+            </a:r>
+            <a:endParaRPr lang="en-US" sz="1500" dirty="0"/>
+          </a:p>
+          <a:p>
+            <a:pPr>
+              <a:spcAft>
+                <a:spcPts val="800"/>
+              </a:spcAft>
+            </a:pPr>
+            <a:r>
+              <a:rPr lang="en-US" sz="1500" dirty="0">
                 <a:solidFill>
                   <a:srgbClr val="E8ECF4"/>
                 </a:solidFill>
@@ -3819,17 +5161,18 @@
                 <a:ea typeface="Calibri" pitchFamily="34" charset="-122"/>
                 <a:cs typeface="Calibri" pitchFamily="34" charset="-120"/>
               </a:rPr>
-              <a:t>{{Name}} — {{Role, background}}</a:t>
-            </a:r>
-            <a:endParaRPr lang="en-US" sz="1600" dirty="0"/>
-          </a:p>
-          <a:p>
-            <a:pPr marL="342900" indent="-342900">
-              <a:buSzPct val="100000"/>
-              <a:buChar char="•"/>
-            </a:pPr>
-            <a:r>
-              <a:rPr lang="en-US" sz="1600" dirty="0">
+              <a:t>{{CTO/Co-founder}} — {{technical background + relevant achievement}}</a:t>
+            </a:r>
+            <a:endParaRPr lang="en-US" sz="1500" dirty="0"/>
+          </a:p>
+          <a:p>
+            <a:pPr>
+              <a:spcAft>
+                <a:spcPts val="800"/>
+              </a:spcAft>
+            </a:pPr>
+            <a:r>
+              <a:rPr lang="en-US" sz="1500" dirty="0">
                 <a:solidFill>
                   <a:srgbClr val="E8ECF4"/>
                 </a:solidFill>
@@ -3837,9 +5180,9 @@
                 <a:ea typeface="Calibri" pitchFamily="34" charset="-122"/>
                 <a:cs typeface="Calibri" pitchFamily="34" charset="-120"/>
               </a:rPr>
-              <a:t>{{Advisors / investors}}</a:t>
-            </a:r>
-            <a:endParaRPr lang="en-US" sz="1600" dirty="0"/>
+              <a:t>{{Advisor/Investor}} — {{credibility signal}}</a:t>
+            </a:r>
+            <a:endParaRPr lang="en-US" sz="1500" dirty="0"/>
           </a:p>
         </p:txBody>
       </p:sp>
